--- a/docs/AbastoRed_Avance2_Presentacion.pptx
+++ b/docs/AbastoRed_Avance2_Presentacion.pptx
@@ -4,25 +4,27 @@
   <p:sldMasterIdLst>
     <p:sldMasterId id="2147483648" r:id="rId1"/>
   </p:sldMasterIdLst>
+  <p:notesMasterIdLst>
+    <p:notesMasterId r:id="rId17"/>
+  </p:notesMasterIdLst>
   <p:sldIdLst>
-    <p:sldId id="256" r:id="rId7"/>
-    <p:sldId id="257" r:id="rId9"/>
-    <p:sldId id="258" r:id="rId10"/>
-    <p:sldId id="259" r:id="rId11"/>
-    <p:sldId id="260" r:id="rId12"/>
-    <p:sldId id="261" r:id="rId13"/>
-    <p:sldId id="262" r:id="rId14"/>
-    <p:sldId id="263" r:id="rId15"/>
-    <p:sldId id="264" r:id="rId16"/>
-    <p:sldId id="265" r:id="rId17"/>
-    <p:sldId id="266" r:id="rId18"/>
-    <p:sldId id="267" r:id="rId19"/>
-    <p:sldId id="268" r:id="rId20"/>
-    <p:sldId id="269" r:id="rId21"/>
-    <p:sldId id="270" r:id="rId22"/>
-    <p:sldId id="271" r:id="rId23"/>
+    <p:sldId id="256" r:id="rId2"/>
+    <p:sldId id="257" r:id="rId3"/>
+    <p:sldId id="258" r:id="rId4"/>
+    <p:sldId id="259" r:id="rId5"/>
+    <p:sldId id="260" r:id="rId6"/>
+    <p:sldId id="261" r:id="rId7"/>
+    <p:sldId id="262" r:id="rId8"/>
+    <p:sldId id="263" r:id="rId9"/>
+    <p:sldId id="264" r:id="rId10"/>
+    <p:sldId id="265" r:id="rId11"/>
+    <p:sldId id="266" r:id="rId12"/>
+    <p:sldId id="267" r:id="rId13"/>
+    <p:sldId id="268" r:id="rId14"/>
+    <p:sldId id="269" r:id="rId15"/>
+    <p:sldId id="271" r:id="rId16"/>
   </p:sldIdLst>
-  <p:sldSz cx="12191695" cy="6858000" type="screen4x3"/>
+  <p:sldSz cx="12192000" cy="6858000"/>
   <p:notesSz cx="6858000" cy="9144000"/>
   <p:defaultTextStyle>
     <a:defPPr>
@@ -119,11 +121,27 @@
       </a:defRPr>
     </a:lvl9pPr>
   </p:defaultTextStyle>
+  <p:extLst>
+    <p:ext uri="{EFAFB233-063F-42B5-8137-9DF3F51BA10A}">
+      <p15:sldGuideLst xmlns:p15="http://schemas.microsoft.com/office/powerpoint/2012/main">
+        <p15:guide id="1" orient="horz" pos="2160">
+          <p15:clr>
+            <a:srgbClr val="A4A3A4"/>
+          </p15:clr>
+        </p15:guide>
+        <p15:guide id="2" pos="2880">
+          <p15:clr>
+            <a:srgbClr val="A4A3A4"/>
+          </p15:clr>
+        </p15:guide>
+      </p15:sldGuideLst>
+    </p:ext>
+  </p:extLst>
 </p:presentation>
 </file>
 
 <file path=ppt/notesMasters/notesMaster1.xml><?xml version="1.0" encoding="utf-8"?>
-<p:notesMaster xmlns:a="http://schemas.openxmlformats.org/drawingml/2006/main" xmlns:p="http://schemas.openxmlformats.org/presentationml/2006/main" xmlns:r="http://schemas.openxmlformats.org/officeDocument/2006/relationships">
+<p:notesMaster xmlns:a="http://schemas.openxmlformats.org/drawingml/2006/main" xmlns:r="http://schemas.openxmlformats.org/officeDocument/2006/relationships" xmlns:p="http://schemas.openxmlformats.org/presentationml/2006/main">
   <p:cSld>
     <p:bg>
       <p:bgRef idx="1001">
@@ -144,241 +162,16 @@
           <a:chExt cx="0" cy="0"/>
         </a:xfrm>
       </p:grpSpPr>
-      <p:sp>
-        <p:nvSpPr>
-          <p:cNvPr id="2" name="Header Placeholder 1"/>
-          <p:cNvSpPr>
-            <a:spLocks noGrp="1"/>
-          </p:cNvSpPr>
-          <p:nvPr>
-            <p:ph type="hdr" sz="quarter"/>
-          </p:nvPr>
-        </p:nvSpPr>
-        <p:spPr>
-          <a:xfrm>
-            <a:off x="0" y="0"/>
-            <a:ext cx="2971800" cy="457200"/>
-          </a:xfrm>
-          <a:prstGeom prst="rect">
-            <a:avLst/>
-          </a:prstGeom>
-        </p:spPr>
-        <p:txBody>
-          <a:bodyPr vert="horz" lIns="91440" tIns="45720" rIns="91440" bIns="45720" rtlCol="0"/>
-          <a:lstStyle>
-            <a:lvl1pPr algn="l">
-              <a:defRPr sz="1200"/>
-            </a:lvl1pPr>
-          </a:lstStyle>
-          <a:p>
-            <a:endParaRPr lang="en-US"/>
-          </a:p>
-        </p:txBody>
-      </p:sp>
-      <p:sp>
-        <p:nvSpPr>
-          <p:cNvPr id="3" name="Date Placeholder 2"/>
-          <p:cNvSpPr>
-            <a:spLocks noGrp="1"/>
-          </p:cNvSpPr>
-          <p:nvPr>
-            <p:ph type="dt" idx="1"/>
-          </p:nvPr>
-        </p:nvSpPr>
-        <p:spPr>
-          <a:xfrm>
-            <a:off x="3884613" y="0"/>
-            <a:ext cx="2971800" cy="457200"/>
-          </a:xfrm>
-          <a:prstGeom prst="rect">
-            <a:avLst/>
-          </a:prstGeom>
-        </p:spPr>
-        <p:txBody>
-          <a:bodyPr vert="horz" lIns="91440" tIns="45720" rIns="91440" bIns="45720" rtlCol="0"/>
-          <a:lstStyle>
-            <a:lvl1pPr algn="r">
-              <a:defRPr sz="1200"/>
-            </a:lvl1pPr>
-          </a:lstStyle>
-          <a:p>
-            <a:fld id="{0F89C1C7-3DCD-1040-A9CF-14679D8B5DDD}" type="datetimeFigureOut">
-              <a:rPr lang="en-US" smtClean="0"/>
-              <a:t>10/17/16</a:t>
-            </a:fld>
-            <a:endParaRPr lang="en-US"/>
-          </a:p>
-        </p:txBody>
-      </p:sp>
-      <p:sp>
-        <p:nvSpPr>
-          <p:cNvPr id="4" name="Slide Image Placeholder 3"/>
-          <p:cNvSpPr>
-            <a:spLocks noGrp="1" noRot="1" noChangeAspect="1"/>
-          </p:cNvSpPr>
-          <p:nvPr>
-            <p:ph type="sldImg" idx="2"/>
-          </p:nvPr>
-        </p:nvSpPr>
-        <p:spPr>
-          <a:xfrm>
-            <a:off x="1143000" y="685800"/>
-            <a:ext cx="4572000" cy="3429000"/>
-          </a:xfrm>
-          <a:prstGeom prst="rect">
-            <a:avLst/>
-          </a:prstGeom>
-          <a:noFill/>
-          <a:ln w="12700">
-            <a:solidFill>
-              <a:prstClr val="black"/>
-            </a:solidFill>
-          </a:ln>
-        </p:spPr>
-        <p:txBody>
-          <a:bodyPr vert="horz" lIns="91440" tIns="45720" rIns="91440" bIns="45720" rtlCol="0" anchor="ctr"/>
-          <a:lstStyle/>
-          <a:p>
-            <a:endParaRPr lang="en-US"/>
-          </a:p>
-        </p:txBody>
-      </p:sp>
-      <p:sp>
-        <p:nvSpPr>
-          <p:cNvPr id="5" name="Notes Placeholder 4"/>
-          <p:cNvSpPr>
-            <a:spLocks noGrp="1"/>
-          </p:cNvSpPr>
-          <p:nvPr>
-            <p:ph type="body" sz="quarter" idx="3"/>
-          </p:nvPr>
-        </p:nvSpPr>
-        <p:spPr>
-          <a:xfrm>
-            <a:off x="685800" y="4343400"/>
-            <a:ext cx="5486400" cy="4114800"/>
-          </a:xfrm>
-          <a:prstGeom prst="rect">
-            <a:avLst/>
-          </a:prstGeom>
-        </p:spPr>
-        <p:txBody>
-          <a:bodyPr vert="horz" lIns="91440" tIns="45720" rIns="91440" bIns="45720" rtlCol="0"/>
-          <a:lstStyle/>
-          <a:p>
-            <a:pPr lvl="0"/>
-            <a:r>
-              <a:rPr lang="en-US" smtClean="0"/>
-              <a:t>Click to edit Master text styles</a:t>
-            </a:r>
-          </a:p>
-          <a:p>
-            <a:pPr lvl="1"/>
-            <a:r>
-              <a:rPr lang="en-US" smtClean="0"/>
-              <a:t>Second level</a:t>
-            </a:r>
-          </a:p>
-          <a:p>
-            <a:pPr lvl="2"/>
-            <a:r>
-              <a:rPr lang="en-US" smtClean="0"/>
-              <a:t>Third level</a:t>
-            </a:r>
-          </a:p>
-          <a:p>
-            <a:pPr lvl="3"/>
-            <a:r>
-              <a:rPr lang="en-US" smtClean="0"/>
-              <a:t>Fourth level</a:t>
-            </a:r>
-          </a:p>
-          <a:p>
-            <a:pPr lvl="4"/>
-            <a:r>
-              <a:rPr lang="en-US" smtClean="0"/>
-              <a:t>Fifth level</a:t>
-            </a:r>
-            <a:endParaRPr lang="en-US"/>
-          </a:p>
-        </p:txBody>
-      </p:sp>
-      <p:sp>
-        <p:nvSpPr>
-          <p:cNvPr id="6" name="Footer Placeholder 5"/>
-          <p:cNvSpPr>
-            <a:spLocks noGrp="1"/>
-          </p:cNvSpPr>
-          <p:nvPr>
-            <p:ph type="ftr" sz="quarter" idx="4"/>
-          </p:nvPr>
-        </p:nvSpPr>
-        <p:spPr>
-          <a:xfrm>
-            <a:off x="0" y="8685213"/>
-            <a:ext cx="2971800" cy="457200"/>
-          </a:xfrm>
-          <a:prstGeom prst="rect">
-            <a:avLst/>
-          </a:prstGeom>
-        </p:spPr>
-        <p:txBody>
-          <a:bodyPr vert="horz" lIns="91440" tIns="45720" rIns="91440" bIns="45720" rtlCol="0" anchor="b"/>
-          <a:lstStyle>
-            <a:lvl1pPr algn="l">
-              <a:defRPr sz="1200"/>
-            </a:lvl1pPr>
-          </a:lstStyle>
-          <a:p>
-            <a:endParaRPr lang="en-US"/>
-          </a:p>
-        </p:txBody>
-      </p:sp>
-      <p:sp>
-        <p:nvSpPr>
-          <p:cNvPr id="7" name="Slide Number Placeholder 6"/>
-          <p:cNvSpPr>
-            <a:spLocks noGrp="1"/>
-          </p:cNvSpPr>
-          <p:nvPr>
-            <p:ph type="sldNum" sz="quarter" idx="5"/>
-          </p:nvPr>
-        </p:nvSpPr>
-        <p:spPr>
-          <a:xfrm>
-            <a:off x="3884613" y="8685213"/>
-            <a:ext cx="2971800" cy="457200"/>
-          </a:xfrm>
-          <a:prstGeom prst="rect">
-            <a:avLst/>
-          </a:prstGeom>
-        </p:spPr>
-        <p:txBody>
-          <a:bodyPr vert="horz" lIns="91440" tIns="45720" rIns="91440" bIns="45720" rtlCol="0" anchor="b"/>
-          <a:lstStyle>
-            <a:lvl1pPr algn="r">
-              <a:defRPr sz="1200"/>
-            </a:lvl1pPr>
-          </a:lstStyle>
-          <a:p>
-            <a:fld id="{BB5E49A5-4136-284D-997B-48E1D791AD67}" type="slidenum">
-              <a:rPr lang="en-US" smtClean="0"/>
-              <a:t>‹#›</a:t>
-            </a:fld>
-            <a:endParaRPr lang="en-US"/>
-          </a:p>
-        </p:txBody>
-      </p:sp>
     </p:spTree>
     <p:extLst>
       <p:ext uri="{BB962C8B-B14F-4D97-AF65-F5344CB8AC3E}">
-        <p14:creationId xmlns:p14="http://schemas.microsoft.com/office/powerpoint/2010/main" val="2623252185"/>
+        <p14:creationId xmlns:p14="http://schemas.microsoft.com/office/powerpoint/2010/main" val="2441403121"/>
       </p:ext>
     </p:extLst>
   </p:cSld>
   <p:clrMap bg1="lt1" tx1="dk1" bg2="lt2" tx2="dk2" accent1="accent1" accent2="accent2" accent3="accent3" accent4="accent4" accent5="accent5" accent6="accent6" hlink="hlink" folHlink="folHlink"/>
   <p:notesStyle>
-    <a:lvl1pPr marL="0" algn="l" defTabSz="457200" rtl="0" eaLnBrk="1" latinLnBrk="0" hangingPunct="1">
+    <a:lvl1pPr marL="0" algn="l" defTabSz="914400" rtl="0" eaLnBrk="1" latinLnBrk="0" hangingPunct="1">
       <a:defRPr sz="1200" kern="1200">
         <a:solidFill>
           <a:schemeClr val="tx1"/>
@@ -388,7 +181,7 @@
         <a:cs typeface="+mn-cs"/>
       </a:defRPr>
     </a:lvl1pPr>
-    <a:lvl2pPr marL="457200" algn="l" defTabSz="457200" rtl="0" eaLnBrk="1" latinLnBrk="0" hangingPunct="1">
+    <a:lvl2pPr marL="457200" algn="l" defTabSz="914400" rtl="0" eaLnBrk="1" latinLnBrk="0" hangingPunct="1">
       <a:defRPr sz="1200" kern="1200">
         <a:solidFill>
           <a:schemeClr val="tx1"/>
@@ -398,7 +191,7 @@
         <a:cs typeface="+mn-cs"/>
       </a:defRPr>
     </a:lvl2pPr>
-    <a:lvl3pPr marL="914400" algn="l" defTabSz="457200" rtl="0" eaLnBrk="1" latinLnBrk="0" hangingPunct="1">
+    <a:lvl3pPr marL="914400" algn="l" defTabSz="914400" rtl="0" eaLnBrk="1" latinLnBrk="0" hangingPunct="1">
       <a:defRPr sz="1200" kern="1200">
         <a:solidFill>
           <a:schemeClr val="tx1"/>
@@ -408,7 +201,7 @@
         <a:cs typeface="+mn-cs"/>
       </a:defRPr>
     </a:lvl3pPr>
-    <a:lvl4pPr marL="1371600" algn="l" defTabSz="457200" rtl="0" eaLnBrk="1" latinLnBrk="0" hangingPunct="1">
+    <a:lvl4pPr marL="1371600" algn="l" defTabSz="914400" rtl="0" eaLnBrk="1" latinLnBrk="0" hangingPunct="1">
       <a:defRPr sz="1200" kern="1200">
         <a:solidFill>
           <a:schemeClr val="tx1"/>
@@ -418,7 +211,7 @@
         <a:cs typeface="+mn-cs"/>
       </a:defRPr>
     </a:lvl4pPr>
-    <a:lvl5pPr marL="1828800" algn="l" defTabSz="457200" rtl="0" eaLnBrk="1" latinLnBrk="0" hangingPunct="1">
+    <a:lvl5pPr marL="1828800" algn="l" defTabSz="914400" rtl="0" eaLnBrk="1" latinLnBrk="0" hangingPunct="1">
       <a:defRPr sz="1200" kern="1200">
         <a:solidFill>
           <a:schemeClr val="tx1"/>
@@ -428,7 +221,7 @@
         <a:cs typeface="+mn-cs"/>
       </a:defRPr>
     </a:lvl5pPr>
-    <a:lvl6pPr marL="2286000" algn="l" defTabSz="457200" rtl="0" eaLnBrk="1" latinLnBrk="0" hangingPunct="1">
+    <a:lvl6pPr marL="2286000" algn="l" defTabSz="914400" rtl="0" eaLnBrk="1" latinLnBrk="0" hangingPunct="1">
       <a:defRPr sz="1200" kern="1200">
         <a:solidFill>
           <a:schemeClr val="tx1"/>
@@ -438,7 +231,7 @@
         <a:cs typeface="+mn-cs"/>
       </a:defRPr>
     </a:lvl6pPr>
-    <a:lvl7pPr marL="2743200" algn="l" defTabSz="457200" rtl="0" eaLnBrk="1" latinLnBrk="0" hangingPunct="1">
+    <a:lvl7pPr marL="2743200" algn="l" defTabSz="914400" rtl="0" eaLnBrk="1" latinLnBrk="0" hangingPunct="1">
       <a:defRPr sz="1200" kern="1200">
         <a:solidFill>
           <a:schemeClr val="tx1"/>
@@ -448,7 +241,7 @@
         <a:cs typeface="+mn-cs"/>
       </a:defRPr>
     </a:lvl7pPr>
-    <a:lvl8pPr marL="3200400" algn="l" defTabSz="457200" rtl="0" eaLnBrk="1" latinLnBrk="0" hangingPunct="1">
+    <a:lvl8pPr marL="3200400" algn="l" defTabSz="914400" rtl="0" eaLnBrk="1" latinLnBrk="0" hangingPunct="1">
       <a:defRPr sz="1200" kern="1200">
         <a:solidFill>
           <a:schemeClr val="tx1"/>
@@ -458,7 +251,7 @@
         <a:cs typeface="+mn-cs"/>
       </a:defRPr>
     </a:lvl8pPr>
-    <a:lvl9pPr marL="3657600" algn="l" defTabSz="457200" rtl="0" eaLnBrk="1" latinLnBrk="0" hangingPunct="1">
+    <a:lvl9pPr marL="3657600" algn="l" defTabSz="914400" rtl="0" eaLnBrk="1" latinLnBrk="0" hangingPunct="1">
       <a:defRPr sz="1200" kern="1200">
         <a:solidFill>
           <a:schemeClr val="tx1"/>
@@ -473,7 +266,7 @@
 </file>
 
 <file path=ppt/notesSlides/notesSlide1.xml><?xml version="1.0" encoding="utf-8"?>
-<p:notes xmlns:a="http://schemas.openxmlformats.org/drawingml/2006/main" xmlns:p="http://schemas.openxmlformats.org/presentationml/2006/main" xmlns:r="http://schemas.openxmlformats.org/officeDocument/2006/relationships">
+<p:notes xmlns:a="http://schemas.openxmlformats.org/drawingml/2006/main" xmlns:r="http://schemas.openxmlformats.org/officeDocument/2006/relationships" xmlns:p="http://schemas.openxmlformats.org/presentationml/2006/main">
   <p:cSld>
     <p:spTree>
       <p:nvGrpSpPr>
@@ -493,7 +286,7 @@
         <p:nvSpPr>
           <p:cNvPr id="2" name="Slide Image Placeholder 1"/>
           <p:cNvSpPr>
-            <a:spLocks noGrp="1"/>
+            <a:spLocks noGrp="1" noRot="1" noChangeAspect="1"/>
           </p:cNvSpPr>
           <p:nvPr>
             <p:ph type="sldImg" idx="2"/>
@@ -508,7 +301,7 @@
             <a:spLocks noGrp="1"/>
           </p:cNvSpPr>
           <p:nvPr>
-            <p:ph type="body" idx="3" sz="quarter"/>
+            <p:ph type="body" sz="quarter" idx="3"/>
           </p:nvPr>
         </p:nvSpPr>
         <p:spPr/>
@@ -529,7 +322,7 @@
             <a:spLocks noGrp="1"/>
           </p:cNvSpPr>
           <p:nvPr>
-            <p:ph type="sldNum" idx="5" sz="quarter"/>
+            <p:ph type="sldNum" sz="quarter" idx="5"/>
           </p:nvPr>
         </p:nvSpPr>
         <p:spPr/>
@@ -543,7 +336,7 @@
 </file>
 
 <file path=ppt/notesSlides/notesSlide10.xml><?xml version="1.0" encoding="utf-8"?>
-<p:notes xmlns:a="http://schemas.openxmlformats.org/drawingml/2006/main" xmlns:p="http://schemas.openxmlformats.org/presentationml/2006/main" xmlns:r="http://schemas.openxmlformats.org/officeDocument/2006/relationships">
+<p:notes xmlns:a="http://schemas.openxmlformats.org/drawingml/2006/main" xmlns:r="http://schemas.openxmlformats.org/officeDocument/2006/relationships" xmlns:p="http://schemas.openxmlformats.org/presentationml/2006/main">
   <p:cSld>
     <p:spTree>
       <p:nvGrpSpPr>
@@ -563,7 +356,7 @@
         <p:nvSpPr>
           <p:cNvPr id="2" name="Slide Image Placeholder 1"/>
           <p:cNvSpPr>
-            <a:spLocks noGrp="1"/>
+            <a:spLocks noGrp="1" noRot="1" noChangeAspect="1"/>
           </p:cNvSpPr>
           <p:nvPr>
             <p:ph type="sldImg" idx="2"/>
@@ -578,7 +371,7 @@
             <a:spLocks noGrp="1"/>
           </p:cNvSpPr>
           <p:nvPr>
-            <p:ph type="body" idx="3" sz="quarter"/>
+            <p:ph type="body" sz="quarter" idx="3"/>
           </p:nvPr>
         </p:nvSpPr>
         <p:spPr/>
@@ -599,7 +392,7 @@
             <a:spLocks noGrp="1"/>
           </p:cNvSpPr>
           <p:nvPr>
-            <p:ph type="sldNum" idx="5" sz="quarter"/>
+            <p:ph type="sldNum" sz="quarter" idx="5"/>
           </p:nvPr>
         </p:nvSpPr>
         <p:spPr/>
@@ -613,7 +406,7 @@
 </file>
 
 <file path=ppt/notesSlides/notesSlide11.xml><?xml version="1.0" encoding="utf-8"?>
-<p:notes xmlns:a="http://schemas.openxmlformats.org/drawingml/2006/main" xmlns:p="http://schemas.openxmlformats.org/presentationml/2006/main" xmlns:r="http://schemas.openxmlformats.org/officeDocument/2006/relationships">
+<p:notes xmlns:a="http://schemas.openxmlformats.org/drawingml/2006/main" xmlns:r="http://schemas.openxmlformats.org/officeDocument/2006/relationships" xmlns:p="http://schemas.openxmlformats.org/presentationml/2006/main">
   <p:cSld>
     <p:spTree>
       <p:nvGrpSpPr>
@@ -633,7 +426,7 @@
         <p:nvSpPr>
           <p:cNvPr id="2" name="Slide Image Placeholder 1"/>
           <p:cNvSpPr>
-            <a:spLocks noGrp="1"/>
+            <a:spLocks noGrp="1" noRot="1" noChangeAspect="1"/>
           </p:cNvSpPr>
           <p:nvPr>
             <p:ph type="sldImg" idx="2"/>
@@ -648,7 +441,7 @@
             <a:spLocks noGrp="1"/>
           </p:cNvSpPr>
           <p:nvPr>
-            <p:ph type="body" idx="3" sz="quarter"/>
+            <p:ph type="body" sz="quarter" idx="3"/>
           </p:nvPr>
         </p:nvSpPr>
         <p:spPr/>
@@ -669,7 +462,7 @@
             <a:spLocks noGrp="1"/>
           </p:cNvSpPr>
           <p:nvPr>
-            <p:ph type="sldNum" idx="5" sz="quarter"/>
+            <p:ph type="sldNum" sz="quarter" idx="5"/>
           </p:nvPr>
         </p:nvSpPr>
         <p:spPr/>
@@ -683,7 +476,7 @@
 </file>
 
 <file path=ppt/notesSlides/notesSlide12.xml><?xml version="1.0" encoding="utf-8"?>
-<p:notes xmlns:a="http://schemas.openxmlformats.org/drawingml/2006/main" xmlns:p="http://schemas.openxmlformats.org/presentationml/2006/main" xmlns:r="http://schemas.openxmlformats.org/officeDocument/2006/relationships">
+<p:notes xmlns:a="http://schemas.openxmlformats.org/drawingml/2006/main" xmlns:r="http://schemas.openxmlformats.org/officeDocument/2006/relationships" xmlns:p="http://schemas.openxmlformats.org/presentationml/2006/main">
   <p:cSld>
     <p:spTree>
       <p:nvGrpSpPr>
@@ -703,7 +496,7 @@
         <p:nvSpPr>
           <p:cNvPr id="2" name="Slide Image Placeholder 1"/>
           <p:cNvSpPr>
-            <a:spLocks noGrp="1"/>
+            <a:spLocks noGrp="1" noRot="1" noChangeAspect="1"/>
           </p:cNvSpPr>
           <p:nvPr>
             <p:ph type="sldImg" idx="2"/>
@@ -718,7 +511,7 @@
             <a:spLocks noGrp="1"/>
           </p:cNvSpPr>
           <p:nvPr>
-            <p:ph type="body" idx="3" sz="quarter"/>
+            <p:ph type="body" sz="quarter" idx="3"/>
           </p:nvPr>
         </p:nvSpPr>
         <p:spPr/>
@@ -739,7 +532,7 @@
             <a:spLocks noGrp="1"/>
           </p:cNvSpPr>
           <p:nvPr>
-            <p:ph type="sldNum" idx="5" sz="quarter"/>
+            <p:ph type="sldNum" sz="quarter" idx="5"/>
           </p:nvPr>
         </p:nvSpPr>
         <p:spPr/>
@@ -753,7 +546,7 @@
 </file>
 
 <file path=ppt/notesSlides/notesSlide13.xml><?xml version="1.0" encoding="utf-8"?>
-<p:notes xmlns:a="http://schemas.openxmlformats.org/drawingml/2006/main" xmlns:p="http://schemas.openxmlformats.org/presentationml/2006/main" xmlns:r="http://schemas.openxmlformats.org/officeDocument/2006/relationships">
+<p:notes xmlns:a="http://schemas.openxmlformats.org/drawingml/2006/main" xmlns:r="http://schemas.openxmlformats.org/officeDocument/2006/relationships" xmlns:p="http://schemas.openxmlformats.org/presentationml/2006/main">
   <p:cSld>
     <p:spTree>
       <p:nvGrpSpPr>
@@ -773,7 +566,7 @@
         <p:nvSpPr>
           <p:cNvPr id="2" name="Slide Image Placeholder 1"/>
           <p:cNvSpPr>
-            <a:spLocks noGrp="1"/>
+            <a:spLocks noGrp="1" noRot="1" noChangeAspect="1"/>
           </p:cNvSpPr>
           <p:nvPr>
             <p:ph type="sldImg" idx="2"/>
@@ -788,7 +581,7 @@
             <a:spLocks noGrp="1"/>
           </p:cNvSpPr>
           <p:nvPr>
-            <p:ph type="body" idx="3" sz="quarter"/>
+            <p:ph type="body" sz="quarter" idx="3"/>
           </p:nvPr>
         </p:nvSpPr>
         <p:spPr/>
@@ -809,7 +602,7 @@
             <a:spLocks noGrp="1"/>
           </p:cNvSpPr>
           <p:nvPr>
-            <p:ph type="sldNum" idx="5" sz="quarter"/>
+            <p:ph type="sldNum" sz="quarter" idx="5"/>
           </p:nvPr>
         </p:nvSpPr>
         <p:spPr/>
@@ -823,7 +616,7 @@
 </file>
 
 <file path=ppt/notesSlides/notesSlide14.xml><?xml version="1.0" encoding="utf-8"?>
-<p:notes xmlns:a="http://schemas.openxmlformats.org/drawingml/2006/main" xmlns:p="http://schemas.openxmlformats.org/presentationml/2006/main" xmlns:r="http://schemas.openxmlformats.org/officeDocument/2006/relationships">
+<p:notes xmlns:a="http://schemas.openxmlformats.org/drawingml/2006/main" xmlns:r="http://schemas.openxmlformats.org/officeDocument/2006/relationships" xmlns:p="http://schemas.openxmlformats.org/presentationml/2006/main">
   <p:cSld>
     <p:spTree>
       <p:nvGrpSpPr>
@@ -843,7 +636,7 @@
         <p:nvSpPr>
           <p:cNvPr id="2" name="Slide Image Placeholder 1"/>
           <p:cNvSpPr>
-            <a:spLocks noGrp="1"/>
+            <a:spLocks noGrp="1" noRot="1" noChangeAspect="1"/>
           </p:cNvSpPr>
           <p:nvPr>
             <p:ph type="sldImg" idx="2"/>
@@ -858,7 +651,7 @@
             <a:spLocks noGrp="1"/>
           </p:cNvSpPr>
           <p:nvPr>
-            <p:ph type="body" idx="3" sz="quarter"/>
+            <p:ph type="body" sz="quarter" idx="3"/>
           </p:nvPr>
         </p:nvSpPr>
         <p:spPr/>
@@ -879,7 +672,7 @@
             <a:spLocks noGrp="1"/>
           </p:cNvSpPr>
           <p:nvPr>
-            <p:ph type="sldNum" idx="5" sz="quarter"/>
+            <p:ph type="sldNum" sz="quarter" idx="5"/>
           </p:nvPr>
         </p:nvSpPr>
         <p:spPr/>
@@ -893,7 +686,7 @@
 </file>
 
 <file path=ppt/notesSlides/notesSlide15.xml><?xml version="1.0" encoding="utf-8"?>
-<p:notes xmlns:a="http://schemas.openxmlformats.org/drawingml/2006/main" xmlns:p="http://schemas.openxmlformats.org/presentationml/2006/main" xmlns:r="http://schemas.openxmlformats.org/officeDocument/2006/relationships">
+<p:notes xmlns:a="http://schemas.openxmlformats.org/drawingml/2006/main" xmlns:r="http://schemas.openxmlformats.org/officeDocument/2006/relationships" xmlns:p="http://schemas.openxmlformats.org/presentationml/2006/main">
   <p:cSld>
     <p:spTree>
       <p:nvGrpSpPr>
@@ -913,7 +706,7 @@
         <p:nvSpPr>
           <p:cNvPr id="2" name="Slide Image Placeholder 1"/>
           <p:cNvSpPr>
-            <a:spLocks noGrp="1"/>
+            <a:spLocks noGrp="1" noRot="1" noChangeAspect="1"/>
           </p:cNvSpPr>
           <p:nvPr>
             <p:ph type="sldImg" idx="2"/>
@@ -928,7 +721,7 @@
             <a:spLocks noGrp="1"/>
           </p:cNvSpPr>
           <p:nvPr>
-            <p:ph type="body" idx="3" sz="quarter"/>
+            <p:ph type="body" sz="quarter" idx="3"/>
           </p:nvPr>
         </p:nvSpPr>
         <p:spPr/>
@@ -937,7 +730,7 @@
           <a:lstStyle/>
           <a:p>
             <a:r>
-              <a:t>David conduce y los demás manejan su usuario. Duración: 4 minutos. Si algo falla, usar el reporte de evidencias como respaldo.</a:t>
+              <a:t>Cerrar mencionando que los servicios ya responden JSON y XML justamente para las apps del avance 3. Abrir a preguntas: cualquiera puede contestar con la guía de estudio.</a:t>
             </a:r>
           </a:p>
         </p:txBody>
@@ -949,7 +742,7 @@
             <a:spLocks noGrp="1"/>
           </p:cNvSpPr>
           <p:nvPr>
-            <p:ph type="sldNum" idx="5" sz="quarter"/>
+            <p:ph type="sldNum" sz="quarter" idx="5"/>
           </p:nvPr>
         </p:nvSpPr>
         <p:spPr/>
@@ -962,8 +755,8 @@
 </p:notes>
 </file>
 
-<file path=ppt/notesSlides/notesSlide16.xml><?xml version="1.0" encoding="utf-8"?>
-<p:notes xmlns:a="http://schemas.openxmlformats.org/drawingml/2006/main" xmlns:p="http://schemas.openxmlformats.org/presentationml/2006/main" xmlns:r="http://schemas.openxmlformats.org/officeDocument/2006/relationships">
+<file path=ppt/notesSlides/notesSlide2.xml><?xml version="1.0" encoding="utf-8"?>
+<p:notes xmlns:a="http://schemas.openxmlformats.org/drawingml/2006/main" xmlns:r="http://schemas.openxmlformats.org/officeDocument/2006/relationships" xmlns:p="http://schemas.openxmlformats.org/presentationml/2006/main">
   <p:cSld>
     <p:spTree>
       <p:nvGrpSpPr>
@@ -983,7 +776,7 @@
         <p:nvSpPr>
           <p:cNvPr id="2" name="Slide Image Placeholder 1"/>
           <p:cNvSpPr>
-            <a:spLocks noGrp="1"/>
+            <a:spLocks noGrp="1" noRot="1" noChangeAspect="1"/>
           </p:cNvSpPr>
           <p:nvPr>
             <p:ph type="sldImg" idx="2"/>
@@ -998,7 +791,7 @@
             <a:spLocks noGrp="1"/>
           </p:cNvSpPr>
           <p:nvPr>
-            <p:ph type="body" idx="3" sz="quarter"/>
+            <p:ph type="body" sz="quarter" idx="3"/>
           </p:nvPr>
         </p:nvSpPr>
         <p:spPr/>
@@ -1007,7 +800,7 @@
           <a:lstStyle/>
           <a:p>
             <a:r>
-              <a:t>Cerrar mencionando que los servicios ya responden JSON y XML justamente para las apps del avance 3. Abrir a preguntas: cualquiera puede contestar con la guía de estudio.</a:t>
+              <a:t>En el avance 1 todo vivía en una sola aplicación web. Ahora el núcleo del negocio está en 8 servicios independientes. Leer los cuatro números y decir: los servicios comparten un mismo inicio de sesión, hablan JSON y XML y usan las tres bases de datos. El web sigue funcionando aunque un servicio se caiga.</a:t>
             </a:r>
           </a:p>
         </p:txBody>
@@ -1019,7 +812,7 @@
             <a:spLocks noGrp="1"/>
           </p:cNvSpPr>
           <p:nvPr>
-            <p:ph type="sldNum" idx="5" sz="quarter"/>
+            <p:ph type="sldNum" sz="quarter" idx="5"/>
           </p:nvPr>
         </p:nvSpPr>
         <p:spPr/>
@@ -1032,8 +825,8 @@
 </p:notes>
 </file>
 
-<file path=ppt/notesSlides/notesSlide2.xml><?xml version="1.0" encoding="utf-8"?>
-<p:notes xmlns:a="http://schemas.openxmlformats.org/drawingml/2006/main" xmlns:p="http://schemas.openxmlformats.org/presentationml/2006/main" xmlns:r="http://schemas.openxmlformats.org/officeDocument/2006/relationships">
+<file path=ppt/notesSlides/notesSlide3.xml><?xml version="1.0" encoding="utf-8"?>
+<p:notes xmlns:a="http://schemas.openxmlformats.org/drawingml/2006/main" xmlns:r="http://schemas.openxmlformats.org/officeDocument/2006/relationships" xmlns:p="http://schemas.openxmlformats.org/presentationml/2006/main">
   <p:cSld>
     <p:spTree>
       <p:nvGrpSpPr>
@@ -1053,7 +846,7 @@
         <p:nvSpPr>
           <p:cNvPr id="2" name="Slide Image Placeholder 1"/>
           <p:cNvSpPr>
-            <a:spLocks noGrp="1"/>
+            <a:spLocks noGrp="1" noRot="1" noChangeAspect="1"/>
           </p:cNvSpPr>
           <p:nvPr>
             <p:ph type="sldImg" idx="2"/>
@@ -1068,7 +861,7 @@
             <a:spLocks noGrp="1"/>
           </p:cNvSpPr>
           <p:nvPr>
-            <p:ph type="body" idx="3" sz="quarter"/>
+            <p:ph type="body" sz="quarter" idx="3"/>
           </p:nvPr>
         </p:nvSpPr>
         <p:spPr/>
@@ -1077,7 +870,7 @@
           <a:lstStyle/>
           <a:p>
             <a:r>
-              <a:t>En el avance 1 todo vivía en una sola aplicación web. Ahora el núcleo del negocio está en 8 servicios independientes. Leer los cuatro números y decir: los servicios comparten un mismo inicio de sesión, hablan JSON y XML y usan las tres bases de datos. El web sigue funcionando aunque un servicio se caiga.</a:t>
+              <a:t>Explicar el diagrama de arriba hacia abajo: el navegador usa el web; Postman, Swagger y después las apps usan los servicios directo. El web llama a los servicios con el token del usuario. Abajo las tres bases. Todo corre en Docker en una misma red; cada servicio tiene su contenedor.</a:t>
             </a:r>
           </a:p>
         </p:txBody>
@@ -1089,7 +882,7 @@
             <a:spLocks noGrp="1"/>
           </p:cNvSpPr>
           <p:nvPr>
-            <p:ph type="sldNum" idx="5" sz="quarter"/>
+            <p:ph type="sldNum" sz="quarter" idx="5"/>
           </p:nvPr>
         </p:nvSpPr>
         <p:spPr/>
@@ -1102,8 +895,8 @@
 </p:notes>
 </file>
 
-<file path=ppt/notesSlides/notesSlide3.xml><?xml version="1.0" encoding="utf-8"?>
-<p:notes xmlns:a="http://schemas.openxmlformats.org/drawingml/2006/main" xmlns:p="http://schemas.openxmlformats.org/presentationml/2006/main" xmlns:r="http://schemas.openxmlformats.org/officeDocument/2006/relationships">
+<file path=ppt/notesSlides/notesSlide4.xml><?xml version="1.0" encoding="utf-8"?>
+<p:notes xmlns:a="http://schemas.openxmlformats.org/drawingml/2006/main" xmlns:r="http://schemas.openxmlformats.org/officeDocument/2006/relationships" xmlns:p="http://schemas.openxmlformats.org/presentationml/2006/main">
   <p:cSld>
     <p:spTree>
       <p:nvGrpSpPr>
@@ -1123,7 +916,7 @@
         <p:nvSpPr>
           <p:cNvPr id="2" name="Slide Image Placeholder 1"/>
           <p:cNvSpPr>
-            <a:spLocks noGrp="1"/>
+            <a:spLocks noGrp="1" noRot="1" noChangeAspect="1"/>
           </p:cNvSpPr>
           <p:nvPr>
             <p:ph type="sldImg" idx="2"/>
@@ -1138,7 +931,7 @@
             <a:spLocks noGrp="1"/>
           </p:cNvSpPr>
           <p:nvPr>
-            <p:ph type="body" idx="3" sz="quarter"/>
+            <p:ph type="body" sz="quarter" idx="3"/>
           </p:nvPr>
         </p:nvSpPr>
         <p:spPr/>
@@ -1147,7 +940,7 @@
           <a:lstStyle/>
           <a:p>
             <a:r>
-              <a:t>Explicar el diagrama de arriba hacia abajo: el navegador usa el web; Postman, Swagger y después las apps usan los servicios directo. El web llama a los servicios con el token del usuario. Abajo las tres bases. Todo corre en Docker en una misma red; cada servicio tiene su contenedor.</a:t>
+              <a:t>Dividimos por capacidad de negocio y por quién escribe cada dato: cada tabla tiene un solo servicio que la modifica. El diseño original tenía 13; juntamos los que usaban las mismas consultas (cobertura, brechas, recomendaciones en análisis). Si preguntan por la base: comparten instancia de PostgreSQL, pero con un dueño por tabla; separar esquemas es el siguiente paso.</a:t>
             </a:r>
           </a:p>
         </p:txBody>
@@ -1159,7 +952,7 @@
             <a:spLocks noGrp="1"/>
           </p:cNvSpPr>
           <p:nvPr>
-            <p:ph type="sldNum" idx="5" sz="quarter"/>
+            <p:ph type="sldNum" sz="quarter" idx="5"/>
           </p:nvPr>
         </p:nvSpPr>
         <p:spPr/>
@@ -1172,8 +965,8 @@
 </p:notes>
 </file>
 
-<file path=ppt/notesSlides/notesSlide4.xml><?xml version="1.0" encoding="utf-8"?>
-<p:notes xmlns:a="http://schemas.openxmlformats.org/drawingml/2006/main" xmlns:p="http://schemas.openxmlformats.org/presentationml/2006/main" xmlns:r="http://schemas.openxmlformats.org/officeDocument/2006/relationships">
+<file path=ppt/notesSlides/notesSlide5.xml><?xml version="1.0" encoding="utf-8"?>
+<p:notes xmlns:a="http://schemas.openxmlformats.org/drawingml/2006/main" xmlns:r="http://schemas.openxmlformats.org/officeDocument/2006/relationships" xmlns:p="http://schemas.openxmlformats.org/presentationml/2006/main">
   <p:cSld>
     <p:spTree>
       <p:nvGrpSpPr>
@@ -1193,7 +986,7 @@
         <p:nvSpPr>
           <p:cNvPr id="2" name="Slide Image Placeholder 1"/>
           <p:cNvSpPr>
-            <a:spLocks noGrp="1"/>
+            <a:spLocks noGrp="1" noRot="1" noChangeAspect="1"/>
           </p:cNvSpPr>
           <p:nvPr>
             <p:ph type="sldImg" idx="2"/>
@@ -1208,7 +1001,7 @@
             <a:spLocks noGrp="1"/>
           </p:cNvSpPr>
           <p:nvPr>
-            <p:ph type="body" idx="3" sz="quarter"/>
+            <p:ph type="body" sz="quarter" idx="3"/>
           </p:nvPr>
         </p:nvSpPr>
         <p:spPr/>
@@ -1217,7 +1010,7 @@
           <a:lstStyle/>
           <a:p>
             <a:r>
-              <a:t>Dividimos por capacidad de negocio y por quién escribe cada dato: cada tabla tiene un solo servicio que la modifica. El diseño original tenía 13; juntamos los que usaban las mismas consultas (cobertura, brechas, recomendaciones en análisis). Si preguntan por la base: comparten instancia de PostgreSQL, pero con un dueño por tabla; separar esquemas es el siguiente paso.</a:t>
+              <a:t>Todo esto vive en una sola biblioteca (abasto_api); cada servicio sólo declara sus rutas. Por eso los 8 se comportan igual. Mostrar un Swagger y señalar el botón Authorize y los códigos de error documentados.</a:t>
             </a:r>
           </a:p>
         </p:txBody>
@@ -1229,7 +1022,7 @@
             <a:spLocks noGrp="1"/>
           </p:cNvSpPr>
           <p:nvPr>
-            <p:ph type="sldNum" idx="5" sz="quarter"/>
+            <p:ph type="sldNum" sz="quarter" idx="5"/>
           </p:nvPr>
         </p:nvSpPr>
         <p:spPr/>
@@ -1242,8 +1035,8 @@
 </p:notes>
 </file>
 
-<file path=ppt/notesSlides/notesSlide5.xml><?xml version="1.0" encoding="utf-8"?>
-<p:notes xmlns:a="http://schemas.openxmlformats.org/drawingml/2006/main" xmlns:p="http://schemas.openxmlformats.org/presentationml/2006/main" xmlns:r="http://schemas.openxmlformats.org/officeDocument/2006/relationships">
+<file path=ppt/notesSlides/notesSlide6.xml><?xml version="1.0" encoding="utf-8"?>
+<p:notes xmlns:a="http://schemas.openxmlformats.org/drawingml/2006/main" xmlns:r="http://schemas.openxmlformats.org/officeDocument/2006/relationships" xmlns:p="http://schemas.openxmlformats.org/presentationml/2006/main">
   <p:cSld>
     <p:spTree>
       <p:nvGrpSpPr>
@@ -1263,7 +1056,7 @@
         <p:nvSpPr>
           <p:cNvPr id="2" name="Slide Image Placeholder 1"/>
           <p:cNvSpPr>
-            <a:spLocks noGrp="1"/>
+            <a:spLocks noGrp="1" noRot="1" noChangeAspect="1"/>
           </p:cNvSpPr>
           <p:nvPr>
             <p:ph type="sldImg" idx="2"/>
@@ -1278,7 +1071,7 @@
             <a:spLocks noGrp="1"/>
           </p:cNvSpPr>
           <p:nvPr>
-            <p:ph type="body" idx="3" sz="quarter"/>
+            <p:ph type="body" sz="quarter" idx="3"/>
           </p:nvPr>
         </p:nvSpPr>
         <p:spPr/>
@@ -1287,7 +1080,7 @@
           <a:lstStyle/>
           <a:p>
             <a:r>
-              <a:t>Todo esto vive en una sola biblioteca (abasto_api); cada servicio sólo declara sus rutas. Por eso los 8 se comportan igual. Mostrar un Swagger y señalar el botón Authorize y los códigos de error documentados.</a:t>
+              <a:t>Un JWT normal no se puede apagar antes de que venza. Por eso además de la firma revisamos Redis: si la sesión ya no está o el token fue revocado, no pasa. Así cerrar sesión en un lado la cierra en todos. Demo corta: login en Swagger, usar el token en otro servicio, logout, el mismo token da 401 token_revocado.</a:t>
             </a:r>
           </a:p>
         </p:txBody>
@@ -1299,7 +1092,7 @@
             <a:spLocks noGrp="1"/>
           </p:cNvSpPr>
           <p:nvPr>
-            <p:ph type="sldNum" idx="5" sz="quarter"/>
+            <p:ph type="sldNum" sz="quarter" idx="5"/>
           </p:nvPr>
         </p:nvSpPr>
         <p:spPr/>
@@ -1312,8 +1105,8 @@
 </p:notes>
 </file>
 
-<file path=ppt/notesSlides/notesSlide6.xml><?xml version="1.0" encoding="utf-8"?>
-<p:notes xmlns:a="http://schemas.openxmlformats.org/drawingml/2006/main" xmlns:p="http://schemas.openxmlformats.org/presentationml/2006/main" xmlns:r="http://schemas.openxmlformats.org/officeDocument/2006/relationships">
+<file path=ppt/notesSlides/notesSlide7.xml><?xml version="1.0" encoding="utf-8"?>
+<p:notes xmlns:a="http://schemas.openxmlformats.org/drawingml/2006/main" xmlns:r="http://schemas.openxmlformats.org/officeDocument/2006/relationships" xmlns:p="http://schemas.openxmlformats.org/presentationml/2006/main">
   <p:cSld>
     <p:spTree>
       <p:nvGrpSpPr>
@@ -1333,7 +1126,7 @@
         <p:nvSpPr>
           <p:cNvPr id="2" name="Slide Image Placeholder 1"/>
           <p:cNvSpPr>
-            <a:spLocks noGrp="1"/>
+            <a:spLocks noGrp="1" noRot="1" noChangeAspect="1"/>
           </p:cNvSpPr>
           <p:nvPr>
             <p:ph type="sldImg" idx="2"/>
@@ -1348,7 +1141,7 @@
             <a:spLocks noGrp="1"/>
           </p:cNvSpPr>
           <p:nvPr>
-            <p:ph type="body" idx="3" sz="quarter"/>
+            <p:ph type="body" sz="quarter" idx="3"/>
           </p:nvPr>
         </p:nvSpPr>
         <p:spPr/>
@@ -1357,7 +1150,7 @@
           <a:lstStyle/>
           <a:p>
             <a:r>
-              <a:t>Un JWT normal no se puede apagar antes de que venza. Por eso además de la firma revisamos Redis: si la sesión ya no está o el token fue revocado, no pasa. Así cerrar sesión en un lado la cierra en todos. Demo corta: login en Swagger, usar el token en otro servicio, logout, el mismo token da 401 token_revocado.</a:t>
+              <a:t>Un comando levanta los 12 contenedores; esperan a que las bases estén sanas. Variables en .env (no se sube al repositorio). Mostrar docker compose ps con los 12 healthy.</a:t>
             </a:r>
           </a:p>
         </p:txBody>
@@ -1369,7 +1162,7 @@
             <a:spLocks noGrp="1"/>
           </p:cNvSpPr>
           <p:nvPr>
-            <p:ph type="sldNum" idx="5" sz="quarter"/>
+            <p:ph type="sldNum" sz="quarter" idx="5"/>
           </p:nvPr>
         </p:nvSpPr>
         <p:spPr/>
@@ -1382,8 +1175,8 @@
 </p:notes>
 </file>
 
-<file path=ppt/notesSlides/notesSlide7.xml><?xml version="1.0" encoding="utf-8"?>
-<p:notes xmlns:a="http://schemas.openxmlformats.org/drawingml/2006/main" xmlns:p="http://schemas.openxmlformats.org/presentationml/2006/main" xmlns:r="http://schemas.openxmlformats.org/officeDocument/2006/relationships">
+<file path=ppt/notesSlides/notesSlide8.xml><?xml version="1.0" encoding="utf-8"?>
+<p:notes xmlns:a="http://schemas.openxmlformats.org/drawingml/2006/main" xmlns:r="http://schemas.openxmlformats.org/officeDocument/2006/relationships" xmlns:p="http://schemas.openxmlformats.org/presentationml/2006/main">
   <p:cSld>
     <p:spTree>
       <p:nvGrpSpPr>
@@ -1403,7 +1196,7 @@
         <p:nvSpPr>
           <p:cNvPr id="2" name="Slide Image Placeholder 1"/>
           <p:cNvSpPr>
-            <a:spLocks noGrp="1"/>
+            <a:spLocks noGrp="1" noRot="1" noChangeAspect="1"/>
           </p:cNvSpPr>
           <p:nvPr>
             <p:ph type="sldImg" idx="2"/>
@@ -1418,7 +1211,7 @@
             <a:spLocks noGrp="1"/>
           </p:cNvSpPr>
           <p:nvPr>
-            <p:ph type="body" idx="3" sz="quarter"/>
+            <p:ph type="body" sz="quarter" idx="3"/>
           </p:nvPr>
         </p:nvSpPr>
         <p:spPr/>
@@ -1427,7 +1220,7 @@
           <a:lstStyle/>
           <a:p>
             <a:r>
-              <a:t>Un comando levanta los 12 contenedores; esperan a que las bases estén sanas. Variables en .env (no se sube al repositorio). Mostrar docker compose ps con los 12 healthy.</a:t>
+              <a:t>Fotos y evidencias del comercio se guardan en MongoDB GridFS; sólo las ven el dueño y la coordinación. Nuevo perfil Operador de Proveedor: el dueño da de alta a sus empleados, que atienden pedidos sin tocar precios. Demo: subir foto del comercio; alta de un operador.</a:t>
             </a:r>
           </a:p>
         </p:txBody>
@@ -1439,7 +1232,7 @@
             <a:spLocks noGrp="1"/>
           </p:cNvSpPr>
           <p:nvPr>
-            <p:ph type="sldNum" idx="5" sz="quarter"/>
+            <p:ph type="sldNum" sz="quarter" idx="5"/>
           </p:nvPr>
         </p:nvSpPr>
         <p:spPr/>
@@ -1452,8 +1245,8 @@
 </p:notes>
 </file>
 
-<file path=ppt/notesSlides/notesSlide8.xml><?xml version="1.0" encoding="utf-8"?>
-<p:notes xmlns:a="http://schemas.openxmlformats.org/drawingml/2006/main" xmlns:p="http://schemas.openxmlformats.org/presentationml/2006/main" xmlns:r="http://schemas.openxmlformats.org/officeDocument/2006/relationships">
+<file path=ppt/notesSlides/notesSlide9.xml><?xml version="1.0" encoding="utf-8"?>
+<p:notes xmlns:a="http://schemas.openxmlformats.org/drawingml/2006/main" xmlns:r="http://schemas.openxmlformats.org/officeDocument/2006/relationships" xmlns:p="http://schemas.openxmlformats.org/presentationml/2006/main">
   <p:cSld>
     <p:spTree>
       <p:nvGrpSpPr>
@@ -1473,7 +1266,7 @@
         <p:nvSpPr>
           <p:cNvPr id="2" name="Slide Image Placeholder 1"/>
           <p:cNvSpPr>
-            <a:spLocks noGrp="1"/>
+            <a:spLocks noGrp="1" noRot="1" noChangeAspect="1"/>
           </p:cNvSpPr>
           <p:nvPr>
             <p:ph type="sldImg" idx="2"/>
@@ -1488,7 +1281,7 @@
             <a:spLocks noGrp="1"/>
           </p:cNvSpPr>
           <p:nvPr>
-            <p:ph type="body" idx="3" sz="quarter"/>
+            <p:ph type="body" sz="quarter" idx="3"/>
           </p:nvPr>
         </p:nvSpPr>
         <p:spPr/>
@@ -1497,7 +1290,7 @@
           <a:lstStyle/>
           <a:p>
             <a:r>
-              <a:t>Fotos y evidencias del comercio se guardan en MongoDB GridFS; sólo las ven el dueño y la coordinación. Nuevo perfil Operador de Proveedor: el dueño da de alta a sus empleados, que atienden pedidos sin tocar precios. Demo: subir foto del comercio; alta de un operador.</a:t>
+              <a:t>El web llama a los servicios con el mismo token del usuario. Si uno no responde, calcula con su propia biblioteca y muestra la fuente. Para no esperar en cada página, recuerda la falla 30 segundos en Redis (cortacircuitos): de 4.1 s a menos de 0.1 s. Lo probamos apagando ms-analisis y ms-notificaciones.</a:t>
             </a:r>
           </a:p>
         </p:txBody>
@@ -1509,77 +1302,7 @@
             <a:spLocks noGrp="1"/>
           </p:cNvSpPr>
           <p:nvPr>
-            <p:ph type="sldNum" idx="5" sz="quarter"/>
-          </p:nvPr>
-        </p:nvSpPr>
-        <p:spPr/>
-      </p:sp>
-    </p:spTree>
-  </p:cSld>
-  <p:clrMapOvr>
-    <a:masterClrMapping/>
-  </p:clrMapOvr>
-</p:notes>
-</file>
-
-<file path=ppt/notesSlides/notesSlide9.xml><?xml version="1.0" encoding="utf-8"?>
-<p:notes xmlns:a="http://schemas.openxmlformats.org/drawingml/2006/main" xmlns:p="http://schemas.openxmlformats.org/presentationml/2006/main" xmlns:r="http://schemas.openxmlformats.org/officeDocument/2006/relationships">
-  <p:cSld>
-    <p:spTree>
-      <p:nvGrpSpPr>
-        <p:cNvPr id="1" name=""/>
-        <p:cNvGrpSpPr/>
-        <p:nvPr/>
-      </p:nvGrpSpPr>
-      <p:grpSpPr>
-        <a:xfrm>
-          <a:off x="0" y="0"/>
-          <a:ext cx="0" cy="0"/>
-          <a:chOff x="0" y="0"/>
-          <a:chExt cx="0" cy="0"/>
-        </a:xfrm>
-      </p:grpSpPr>
-      <p:sp>
-        <p:nvSpPr>
-          <p:cNvPr id="2" name="Slide Image Placeholder 1"/>
-          <p:cNvSpPr>
-            <a:spLocks noGrp="1"/>
-          </p:cNvSpPr>
-          <p:nvPr>
-            <p:ph type="sldImg" idx="2"/>
-          </p:nvPr>
-        </p:nvSpPr>
-        <p:spPr/>
-      </p:sp>
-      <p:sp>
-        <p:nvSpPr>
-          <p:cNvPr id="3" name="Notes Placeholder 2"/>
-          <p:cNvSpPr>
-            <a:spLocks noGrp="1"/>
-          </p:cNvSpPr>
-          <p:nvPr>
-            <p:ph type="body" idx="3" sz="quarter"/>
-          </p:nvPr>
-        </p:nvSpPr>
-        <p:spPr/>
-        <p:txBody>
-          <a:bodyPr/>
-          <a:lstStyle/>
-          <a:p>
-            <a:r>
-              <a:t>El web llama a los servicios con el mismo token del usuario. Si uno no responde, calcula con su propia biblioteca y muestra la fuente. Para no esperar en cada página, recuerda la falla 30 segundos en Redis (cortacircuitos): de 4.1 s a menos de 0.1 s. Lo probamos apagando ms-analisis y ms-notificaciones.</a:t>
-            </a:r>
-          </a:p>
-        </p:txBody>
-      </p:sp>
-      <p:sp>
-        <p:nvSpPr>
-          <p:cNvPr id="4" name="Slide Number Placeholder 3"/>
-          <p:cNvSpPr>
-            <a:spLocks noGrp="1"/>
-          </p:cNvSpPr>
-          <p:nvPr>
-            <p:ph type="sldNum" idx="5" sz="quarter"/>
+            <p:ph type="sldNum" sz="quarter" idx="5"/>
           </p:nvPr>
         </p:nvSpPr>
         <p:spPr/>
@@ -1630,10 +1353,9 @@
           <a:lstStyle/>
           <a:p>
             <a:r>
-              <a:rPr lang="en-US" smtClean="0"/>
+              <a:rPr lang="en-US"/>
               <a:t>Click to edit Master title style</a:t>
             </a:r>
-            <a:endParaRPr lang="en-US"/>
           </a:p>
         </p:txBody>
       </p:sp>
@@ -1749,10 +1471,9 @@
           </a:lstStyle>
           <a:p>
             <a:r>
-              <a:rPr lang="en-US" smtClean="0"/>
+              <a:rPr lang="en-US"/>
               <a:t>Click to edit Master subtitle style</a:t>
             </a:r>
-            <a:endParaRPr lang="en-US"/>
           </a:p>
         </p:txBody>
       </p:sp>
@@ -1773,7 +1494,7 @@
           <a:p>
             <a:fld id="{5BCAD085-E8A6-8845-BD4E-CB4CCA059FC4}" type="datetimeFigureOut">
               <a:rPr lang="en-US" smtClean="0"/>
-              <a:t>1/27/13</a:t>
+              <a:t>10/13/2026</a:t>
             </a:fld>
             <a:endParaRPr lang="en-US"/>
           </a:p>
@@ -1867,10 +1588,9 @@
           <a:lstStyle/>
           <a:p>
             <a:r>
-              <a:rPr lang="en-US" smtClean="0"/>
+              <a:rPr lang="en-US"/>
               <a:t>Click to edit Master title style</a:t>
             </a:r>
-            <a:endParaRPr lang="en-US"/>
           </a:p>
         </p:txBody>
       </p:sp>
@@ -1891,38 +1611,37 @@
           <a:p>
             <a:pPr lvl="0"/>
             <a:r>
-              <a:rPr lang="en-US" smtClean="0"/>
+              <a:rPr lang="en-US"/>
               <a:t>Click to edit Master text styles</a:t>
             </a:r>
           </a:p>
           <a:p>
             <a:pPr lvl="1"/>
             <a:r>
-              <a:rPr lang="en-US" smtClean="0"/>
+              <a:rPr lang="en-US"/>
               <a:t>Second level</a:t>
             </a:r>
           </a:p>
           <a:p>
             <a:pPr lvl="2"/>
             <a:r>
-              <a:rPr lang="en-US" smtClean="0"/>
+              <a:rPr lang="en-US"/>
               <a:t>Third level</a:t>
             </a:r>
           </a:p>
           <a:p>
             <a:pPr lvl="3"/>
             <a:r>
-              <a:rPr lang="en-US" smtClean="0"/>
+              <a:rPr lang="en-US"/>
               <a:t>Fourth level</a:t>
             </a:r>
           </a:p>
           <a:p>
             <a:pPr lvl="4"/>
             <a:r>
-              <a:rPr lang="en-US" smtClean="0"/>
+              <a:rPr lang="en-US"/>
               <a:t>Fifth level</a:t>
             </a:r>
-            <a:endParaRPr lang="en-US"/>
           </a:p>
         </p:txBody>
       </p:sp>
@@ -1943,7 +1662,7 @@
           <a:p>
             <a:fld id="{5BCAD085-E8A6-8845-BD4E-CB4CCA059FC4}" type="datetimeFigureOut">
               <a:rPr lang="en-US" smtClean="0"/>
-              <a:t>1/27/13</a:t>
+              <a:t>10/13/2026</a:t>
             </a:fld>
             <a:endParaRPr lang="en-US"/>
           </a:p>
@@ -2042,10 +1761,9 @@
           <a:lstStyle/>
           <a:p>
             <a:r>
-              <a:rPr lang="en-US" smtClean="0"/>
+              <a:rPr lang="en-US"/>
               <a:t>Click to edit Master title style</a:t>
             </a:r>
-            <a:endParaRPr lang="en-US"/>
           </a:p>
         </p:txBody>
       </p:sp>
@@ -2071,38 +1789,37 @@
           <a:p>
             <a:pPr lvl="0"/>
             <a:r>
-              <a:rPr lang="en-US" smtClean="0"/>
+              <a:rPr lang="en-US"/>
               <a:t>Click to edit Master text styles</a:t>
             </a:r>
           </a:p>
           <a:p>
             <a:pPr lvl="1"/>
             <a:r>
-              <a:rPr lang="en-US" smtClean="0"/>
+              <a:rPr lang="en-US"/>
               <a:t>Second level</a:t>
             </a:r>
           </a:p>
           <a:p>
             <a:pPr lvl="2"/>
             <a:r>
-              <a:rPr lang="en-US" smtClean="0"/>
+              <a:rPr lang="en-US"/>
               <a:t>Third level</a:t>
             </a:r>
           </a:p>
           <a:p>
             <a:pPr lvl="3"/>
             <a:r>
-              <a:rPr lang="en-US" smtClean="0"/>
+              <a:rPr lang="en-US"/>
               <a:t>Fourth level</a:t>
             </a:r>
           </a:p>
           <a:p>
             <a:pPr lvl="4"/>
             <a:r>
-              <a:rPr lang="en-US" smtClean="0"/>
+              <a:rPr lang="en-US"/>
               <a:t>Fifth level</a:t>
             </a:r>
-            <a:endParaRPr lang="en-US"/>
           </a:p>
         </p:txBody>
       </p:sp>
@@ -2123,7 +1840,7 @@
           <a:p>
             <a:fld id="{5BCAD085-E8A6-8845-BD4E-CB4CCA059FC4}" type="datetimeFigureOut">
               <a:rPr lang="en-US" smtClean="0"/>
-              <a:t>1/27/13</a:t>
+              <a:t>10/13/2026</a:t>
             </a:fld>
             <a:endParaRPr lang="en-US"/>
           </a:p>
@@ -2217,10 +1934,9 @@
           <a:lstStyle/>
           <a:p>
             <a:r>
-              <a:rPr lang="en-US" smtClean="0"/>
+              <a:rPr lang="en-US"/>
               <a:t>Click to edit Master title style</a:t>
             </a:r>
-            <a:endParaRPr lang="en-US"/>
           </a:p>
         </p:txBody>
       </p:sp>
@@ -2241,38 +1957,37 @@
           <a:p>
             <a:pPr lvl="0"/>
             <a:r>
-              <a:rPr lang="en-US" smtClean="0"/>
+              <a:rPr lang="en-US"/>
               <a:t>Click to edit Master text styles</a:t>
             </a:r>
           </a:p>
           <a:p>
             <a:pPr lvl="1"/>
             <a:r>
-              <a:rPr lang="en-US" smtClean="0"/>
+              <a:rPr lang="en-US"/>
               <a:t>Second level</a:t>
             </a:r>
           </a:p>
           <a:p>
             <a:pPr lvl="2"/>
             <a:r>
-              <a:rPr lang="en-US" smtClean="0"/>
+              <a:rPr lang="en-US"/>
               <a:t>Third level</a:t>
             </a:r>
           </a:p>
           <a:p>
             <a:pPr lvl="3"/>
             <a:r>
-              <a:rPr lang="en-US" smtClean="0"/>
+              <a:rPr lang="en-US"/>
               <a:t>Fourth level</a:t>
             </a:r>
           </a:p>
           <a:p>
             <a:pPr lvl="4"/>
             <a:r>
-              <a:rPr lang="en-US" smtClean="0"/>
+              <a:rPr lang="en-US"/>
               <a:t>Fifth level</a:t>
             </a:r>
-            <a:endParaRPr lang="en-US"/>
           </a:p>
         </p:txBody>
       </p:sp>
@@ -2293,7 +2008,7 @@
           <a:p>
             <a:fld id="{5BCAD085-E8A6-8845-BD4E-CB4CCA059FC4}" type="datetimeFigureOut">
               <a:rPr lang="en-US" smtClean="0"/>
-              <a:t>1/27/13</a:t>
+              <a:t>10/13/2026</a:t>
             </a:fld>
             <a:endParaRPr lang="en-US"/>
           </a:p>
@@ -2396,10 +2111,9 @@
           </a:lstStyle>
           <a:p>
             <a:r>
-              <a:rPr lang="en-US" smtClean="0"/>
+              <a:rPr lang="en-US"/>
               <a:t>Click to edit Master title style</a:t>
             </a:r>
-            <a:endParaRPr lang="en-US"/>
           </a:p>
         </p:txBody>
       </p:sp>
@@ -2516,7 +2230,7 @@
           <a:p>
             <a:pPr lvl="0"/>
             <a:r>
-              <a:rPr lang="en-US" smtClean="0"/>
+              <a:rPr lang="en-US"/>
               <a:t>Click to edit Master text styles</a:t>
             </a:r>
           </a:p>
@@ -2539,7 +2253,7 @@
           <a:p>
             <a:fld id="{5BCAD085-E8A6-8845-BD4E-CB4CCA059FC4}" type="datetimeFigureOut">
               <a:rPr lang="en-US" smtClean="0"/>
-              <a:t>1/27/13</a:t>
+              <a:t>10/13/2026</a:t>
             </a:fld>
             <a:endParaRPr lang="en-US"/>
           </a:p>
@@ -2633,10 +2347,9 @@
           <a:lstStyle/>
           <a:p>
             <a:r>
-              <a:rPr lang="en-US" smtClean="0"/>
+              <a:rPr lang="en-US"/>
               <a:t>Click to edit Master title style</a:t>
             </a:r>
-            <a:endParaRPr lang="en-US"/>
           </a:p>
         </p:txBody>
       </p:sp>
@@ -2690,38 +2403,37 @@
           <a:p>
             <a:pPr lvl="0"/>
             <a:r>
-              <a:rPr lang="en-US" smtClean="0"/>
+              <a:rPr lang="en-US"/>
               <a:t>Click to edit Master text styles</a:t>
             </a:r>
           </a:p>
           <a:p>
             <a:pPr lvl="1"/>
             <a:r>
-              <a:rPr lang="en-US" smtClean="0"/>
+              <a:rPr lang="en-US"/>
               <a:t>Second level</a:t>
             </a:r>
           </a:p>
           <a:p>
             <a:pPr lvl="2"/>
             <a:r>
-              <a:rPr lang="en-US" smtClean="0"/>
+              <a:rPr lang="en-US"/>
               <a:t>Third level</a:t>
             </a:r>
           </a:p>
           <a:p>
             <a:pPr lvl="3"/>
             <a:r>
-              <a:rPr lang="en-US" smtClean="0"/>
+              <a:rPr lang="en-US"/>
               <a:t>Fourth level</a:t>
             </a:r>
           </a:p>
           <a:p>
             <a:pPr lvl="4"/>
             <a:r>
-              <a:rPr lang="en-US" smtClean="0"/>
+              <a:rPr lang="en-US"/>
               <a:t>Fifth level</a:t>
             </a:r>
-            <a:endParaRPr lang="en-US"/>
           </a:p>
         </p:txBody>
       </p:sp>
@@ -2775,38 +2487,37 @@
           <a:p>
             <a:pPr lvl="0"/>
             <a:r>
-              <a:rPr lang="en-US" smtClean="0"/>
+              <a:rPr lang="en-US"/>
               <a:t>Click to edit Master text styles</a:t>
             </a:r>
           </a:p>
           <a:p>
             <a:pPr lvl="1"/>
             <a:r>
-              <a:rPr lang="en-US" smtClean="0"/>
+              <a:rPr lang="en-US"/>
               <a:t>Second level</a:t>
             </a:r>
           </a:p>
           <a:p>
             <a:pPr lvl="2"/>
             <a:r>
-              <a:rPr lang="en-US" smtClean="0"/>
+              <a:rPr lang="en-US"/>
               <a:t>Third level</a:t>
             </a:r>
           </a:p>
           <a:p>
             <a:pPr lvl="3"/>
             <a:r>
-              <a:rPr lang="en-US" smtClean="0"/>
+              <a:rPr lang="en-US"/>
               <a:t>Fourth level</a:t>
             </a:r>
           </a:p>
           <a:p>
             <a:pPr lvl="4"/>
             <a:r>
-              <a:rPr lang="en-US" smtClean="0"/>
+              <a:rPr lang="en-US"/>
               <a:t>Fifth level</a:t>
             </a:r>
-            <a:endParaRPr lang="en-US"/>
           </a:p>
         </p:txBody>
       </p:sp>
@@ -2827,7 +2538,7 @@
           <a:p>
             <a:fld id="{5BCAD085-E8A6-8845-BD4E-CB4CCA059FC4}" type="datetimeFigureOut">
               <a:rPr lang="en-US" smtClean="0"/>
-              <a:t>1/27/13</a:t>
+              <a:t>10/13/2026</a:t>
             </a:fld>
             <a:endParaRPr lang="en-US"/>
           </a:p>
@@ -2925,10 +2636,9 @@
           </a:lstStyle>
           <a:p>
             <a:r>
-              <a:rPr lang="en-US" smtClean="0"/>
+              <a:rPr lang="en-US"/>
               <a:t>Click to edit Master title style</a:t>
             </a:r>
-            <a:endParaRPr lang="en-US"/>
           </a:p>
         </p:txBody>
       </p:sp>
@@ -2991,7 +2701,7 @@
           <a:p>
             <a:pPr lvl="0"/>
             <a:r>
-              <a:rPr lang="en-US" smtClean="0"/>
+              <a:rPr lang="en-US"/>
               <a:t>Click to edit Master text styles</a:t>
             </a:r>
           </a:p>
@@ -3047,38 +2757,37 @@
           <a:p>
             <a:pPr lvl="0"/>
             <a:r>
-              <a:rPr lang="en-US" smtClean="0"/>
+              <a:rPr lang="en-US"/>
               <a:t>Click to edit Master text styles</a:t>
             </a:r>
           </a:p>
           <a:p>
             <a:pPr lvl="1"/>
             <a:r>
-              <a:rPr lang="en-US" smtClean="0"/>
+              <a:rPr lang="en-US"/>
               <a:t>Second level</a:t>
             </a:r>
           </a:p>
           <a:p>
             <a:pPr lvl="2"/>
             <a:r>
-              <a:rPr lang="en-US" smtClean="0"/>
+              <a:rPr lang="en-US"/>
               <a:t>Third level</a:t>
             </a:r>
           </a:p>
           <a:p>
             <a:pPr lvl="3"/>
             <a:r>
-              <a:rPr lang="en-US" smtClean="0"/>
+              <a:rPr lang="en-US"/>
               <a:t>Fourth level</a:t>
             </a:r>
           </a:p>
           <a:p>
             <a:pPr lvl="4"/>
             <a:r>
-              <a:rPr lang="en-US" smtClean="0"/>
+              <a:rPr lang="en-US"/>
               <a:t>Fifth level</a:t>
             </a:r>
-            <a:endParaRPr lang="en-US"/>
           </a:p>
         </p:txBody>
       </p:sp>
@@ -3141,7 +2850,7 @@
           <a:p>
             <a:pPr lvl="0"/>
             <a:r>
-              <a:rPr lang="en-US" smtClean="0"/>
+              <a:rPr lang="en-US"/>
               <a:t>Click to edit Master text styles</a:t>
             </a:r>
           </a:p>
@@ -3197,38 +2906,37 @@
           <a:p>
             <a:pPr lvl="0"/>
             <a:r>
-              <a:rPr lang="en-US" smtClean="0"/>
+              <a:rPr lang="en-US"/>
               <a:t>Click to edit Master text styles</a:t>
             </a:r>
           </a:p>
           <a:p>
             <a:pPr lvl="1"/>
             <a:r>
-              <a:rPr lang="en-US" smtClean="0"/>
+              <a:rPr lang="en-US"/>
               <a:t>Second level</a:t>
             </a:r>
           </a:p>
           <a:p>
             <a:pPr lvl="2"/>
             <a:r>
-              <a:rPr lang="en-US" smtClean="0"/>
+              <a:rPr lang="en-US"/>
               <a:t>Third level</a:t>
             </a:r>
           </a:p>
           <a:p>
             <a:pPr lvl="3"/>
             <a:r>
-              <a:rPr lang="en-US" smtClean="0"/>
+              <a:rPr lang="en-US"/>
               <a:t>Fourth level</a:t>
             </a:r>
           </a:p>
           <a:p>
             <a:pPr lvl="4"/>
             <a:r>
-              <a:rPr lang="en-US" smtClean="0"/>
+              <a:rPr lang="en-US"/>
               <a:t>Fifth level</a:t>
             </a:r>
-            <a:endParaRPr lang="en-US"/>
           </a:p>
         </p:txBody>
       </p:sp>
@@ -3249,7 +2957,7 @@
           <a:p>
             <a:fld id="{5BCAD085-E8A6-8845-BD4E-CB4CCA059FC4}" type="datetimeFigureOut">
               <a:rPr lang="en-US" smtClean="0"/>
-              <a:t>1/27/13</a:t>
+              <a:t>10/13/2026</a:t>
             </a:fld>
             <a:endParaRPr lang="en-US"/>
           </a:p>
@@ -3343,10 +3051,9 @@
           <a:lstStyle/>
           <a:p>
             <a:r>
-              <a:rPr lang="en-US" smtClean="0"/>
+              <a:rPr lang="en-US"/>
               <a:t>Click to edit Master title style</a:t>
             </a:r>
-            <a:endParaRPr lang="en-US"/>
           </a:p>
         </p:txBody>
       </p:sp>
@@ -3367,7 +3074,7 @@
           <a:p>
             <a:fld id="{5BCAD085-E8A6-8845-BD4E-CB4CCA059FC4}" type="datetimeFigureOut">
               <a:rPr lang="en-US" smtClean="0"/>
-              <a:t>1/27/13</a:t>
+              <a:t>10/13/2026</a:t>
             </a:fld>
             <a:endParaRPr lang="en-US"/>
           </a:p>
@@ -3462,7 +3169,7 @@
           <a:p>
             <a:fld id="{5BCAD085-E8A6-8845-BD4E-CB4CCA059FC4}" type="datetimeFigureOut">
               <a:rPr lang="en-US" smtClean="0"/>
-              <a:t>1/27/13</a:t>
+              <a:t>10/13/2026</a:t>
             </a:fld>
             <a:endParaRPr lang="en-US"/>
           </a:p>
@@ -3565,10 +3272,9 @@
           </a:lstStyle>
           <a:p>
             <a:r>
-              <a:rPr lang="en-US" smtClean="0"/>
+              <a:rPr lang="en-US"/>
               <a:t>Click to edit Master title style</a:t>
             </a:r>
-            <a:endParaRPr lang="en-US"/>
           </a:p>
         </p:txBody>
       </p:sp>
@@ -3622,38 +3328,37 @@
           <a:p>
             <a:pPr lvl="0"/>
             <a:r>
-              <a:rPr lang="en-US" smtClean="0"/>
+              <a:rPr lang="en-US"/>
               <a:t>Click to edit Master text styles</a:t>
             </a:r>
           </a:p>
           <a:p>
             <a:pPr lvl="1"/>
             <a:r>
-              <a:rPr lang="en-US" smtClean="0"/>
+              <a:rPr lang="en-US"/>
               <a:t>Second level</a:t>
             </a:r>
           </a:p>
           <a:p>
             <a:pPr lvl="2"/>
             <a:r>
-              <a:rPr lang="en-US" smtClean="0"/>
+              <a:rPr lang="en-US"/>
               <a:t>Third level</a:t>
             </a:r>
           </a:p>
           <a:p>
             <a:pPr lvl="3"/>
             <a:r>
-              <a:rPr lang="en-US" smtClean="0"/>
+              <a:rPr lang="en-US"/>
               <a:t>Fourth level</a:t>
             </a:r>
           </a:p>
           <a:p>
             <a:pPr lvl="4"/>
             <a:r>
-              <a:rPr lang="en-US" smtClean="0"/>
+              <a:rPr lang="en-US"/>
               <a:t>Fifth level</a:t>
             </a:r>
-            <a:endParaRPr lang="en-US"/>
           </a:p>
         </p:txBody>
       </p:sp>
@@ -3716,7 +3421,7 @@
           <a:p>
             <a:pPr lvl="0"/>
             <a:r>
-              <a:rPr lang="en-US" smtClean="0"/>
+              <a:rPr lang="en-US"/>
               <a:t>Click to edit Master text styles</a:t>
             </a:r>
           </a:p>
@@ -3739,7 +3444,7 @@
           <a:p>
             <a:fld id="{5BCAD085-E8A6-8845-BD4E-CB4CCA059FC4}" type="datetimeFigureOut">
               <a:rPr lang="en-US" smtClean="0"/>
-              <a:t>1/27/13</a:t>
+              <a:t>10/13/2026</a:t>
             </a:fld>
             <a:endParaRPr lang="en-US"/>
           </a:p>
@@ -3842,10 +3547,9 @@
           </a:lstStyle>
           <a:p>
             <a:r>
-              <a:rPr lang="en-US" smtClean="0"/>
+              <a:rPr lang="en-US"/>
               <a:t>Click to edit Master title style</a:t>
             </a:r>
-            <a:endParaRPr lang="en-US"/>
           </a:p>
         </p:txBody>
       </p:sp>
@@ -3969,7 +3673,7 @@
           <a:p>
             <a:pPr lvl="0"/>
             <a:r>
-              <a:rPr lang="en-US" smtClean="0"/>
+              <a:rPr lang="en-US"/>
               <a:t>Click to edit Master text styles</a:t>
             </a:r>
           </a:p>
@@ -3992,7 +3696,7 @@
           <a:p>
             <a:fld id="{5BCAD085-E8A6-8845-BD4E-CB4CCA059FC4}" type="datetimeFigureOut">
               <a:rPr lang="en-US" smtClean="0"/>
-              <a:t>1/27/13</a:t>
+              <a:t>10/13/2026</a:t>
             </a:fld>
             <a:endParaRPr lang="en-US"/>
           </a:p>
@@ -4101,10 +3805,9 @@
           <a:lstStyle/>
           <a:p>
             <a:r>
-              <a:rPr lang="en-US" smtClean="0"/>
+              <a:rPr lang="en-US"/>
               <a:t>Click to edit Master title style</a:t>
             </a:r>
-            <a:endParaRPr lang="en-US"/>
           </a:p>
         </p:txBody>
       </p:sp>
@@ -4135,38 +3838,37 @@
           <a:p>
             <a:pPr lvl="0"/>
             <a:r>
-              <a:rPr lang="en-US" smtClean="0"/>
+              <a:rPr lang="en-US"/>
               <a:t>Click to edit Master text styles</a:t>
             </a:r>
           </a:p>
           <a:p>
             <a:pPr lvl="1"/>
             <a:r>
-              <a:rPr lang="en-US" smtClean="0"/>
+              <a:rPr lang="en-US"/>
               <a:t>Second level</a:t>
             </a:r>
           </a:p>
           <a:p>
             <a:pPr lvl="2"/>
             <a:r>
-              <a:rPr lang="en-US" smtClean="0"/>
+              <a:rPr lang="en-US"/>
               <a:t>Third level</a:t>
             </a:r>
           </a:p>
           <a:p>
             <a:pPr lvl="3"/>
             <a:r>
-              <a:rPr lang="en-US" smtClean="0"/>
+              <a:rPr lang="en-US"/>
               <a:t>Fourth level</a:t>
             </a:r>
           </a:p>
           <a:p>
             <a:pPr lvl="4"/>
             <a:r>
-              <a:rPr lang="en-US" smtClean="0"/>
+              <a:rPr lang="en-US"/>
               <a:t>Fifth level</a:t>
             </a:r>
-            <a:endParaRPr lang="en-US"/>
           </a:p>
         </p:txBody>
       </p:sp>
@@ -4205,7 +3907,7 @@
           <a:p>
             <a:fld id="{5BCAD085-E8A6-8845-BD4E-CB4CCA059FC4}" type="datetimeFigureOut">
               <a:rPr lang="en-US" smtClean="0"/>
-              <a:t>1/27/13</a:t>
+              <a:t>10/13/2026</a:t>
             </a:fld>
             <a:endParaRPr lang="en-US"/>
           </a:p>
@@ -4564,7 +4266,7 @@
 </file>
 
 <file path=ppt/slides/slide1.xml><?xml version="1.0" encoding="utf-8"?>
-<p:sld xmlns:a="http://schemas.openxmlformats.org/drawingml/2006/main" xmlns:p="http://schemas.openxmlformats.org/presentationml/2006/main" xmlns:r="http://schemas.openxmlformats.org/officeDocument/2006/relationships">
+<p:sld xmlns:a="http://schemas.openxmlformats.org/drawingml/2006/main" xmlns:r="http://schemas.openxmlformats.org/officeDocument/2006/relationships" xmlns:p="http://schemas.openxmlformats.org/presentationml/2006/main">
   <p:cSld>
     <p:spTree>
       <p:nvGrpSpPr>
@@ -4572,7 +4274,14 @@
         <p:cNvGrpSpPr/>
         <p:nvPr/>
       </p:nvGrpSpPr>
-      <p:grpSpPr/>
+      <p:grpSpPr>
+        <a:xfrm>
+          <a:off x="0" y="0"/>
+          <a:ext cx="0" cy="0"/>
+          <a:chOff x="0" y="0"/>
+          <a:chExt cx="0" cy="0"/>
+        </a:xfrm>
+      </p:grpSpPr>
       <p:sp>
         <p:nvSpPr>
           <p:cNvPr id="2" name="Rectangle 1"/>
@@ -4614,6 +4323,7 @@
           <a:lstStyle/>
           <a:p>
             <a:pPr algn="ctr"/>
+            <a:endParaRPr/>
           </a:p>
         </p:txBody>
       </p:sp>
@@ -4658,6 +4368,7 @@
           <a:lstStyle/>
           <a:p>
             <a:pPr algn="ctr"/>
+            <a:endParaRPr/>
           </a:p>
         </p:txBody>
       </p:sp>
@@ -4865,7 +4576,7 @@
 </file>
 
 <file path=ppt/slides/slide10.xml><?xml version="1.0" encoding="utf-8"?>
-<p:sld xmlns:a="http://schemas.openxmlformats.org/drawingml/2006/main" xmlns:p="http://schemas.openxmlformats.org/presentationml/2006/main" xmlns:r="http://schemas.openxmlformats.org/officeDocument/2006/relationships">
+<p:sld xmlns:a="http://schemas.openxmlformats.org/drawingml/2006/main" xmlns:r="http://schemas.openxmlformats.org/officeDocument/2006/relationships" xmlns:p="http://schemas.openxmlformats.org/presentationml/2006/main">
   <p:cSld>
     <p:spTree>
       <p:nvGrpSpPr>
@@ -4873,7 +4584,14 @@
         <p:cNvGrpSpPr/>
         <p:nvPr/>
       </p:nvGrpSpPr>
-      <p:grpSpPr/>
+      <p:grpSpPr>
+        <a:xfrm>
+          <a:off x="0" y="0"/>
+          <a:ext cx="0" cy="0"/>
+          <a:chOff x="0" y="0"/>
+          <a:chExt cx="0" cy="0"/>
+        </a:xfrm>
+      </p:grpSpPr>
       <p:sp>
         <p:nvSpPr>
           <p:cNvPr id="2" name="Rectangle 1"/>
@@ -4915,6 +4633,7 @@
           <a:lstStyle/>
           <a:p>
             <a:pPr algn="ctr"/>
+            <a:endParaRPr/>
           </a:p>
         </p:txBody>
       </p:sp>
@@ -4994,7 +4713,7 @@
           </a:fontRef>
         </p:style>
         <p:txBody>
-          <a:bodyPr rtlCol="0" anchor="ctr" wrap="square"/>
+          <a:bodyPr wrap="square" rtlCol="0" anchor="ctr"/>
           <a:lstStyle/>
           <a:p>
             <a:pPr algn="ctr">
@@ -5511,19 +5230,67 @@
                 <a:tableStyleId>{5C22544A-7EE6-4342-B048-85BDC9FD1C3A}</a:tableStyleId>
               </a:tblPr>
               <a:tblGrid>
-                <a:gridCol w="1269752"/>
-                <a:gridCol w="1360448"/>
-                <a:gridCol w="1269752"/>
-                <a:gridCol w="1360448"/>
-                <a:gridCol w="1269752"/>
-                <a:gridCol w="1723235"/>
-                <a:gridCol w="1541841"/>
-                <a:gridCol w="1360448"/>
+                <a:gridCol w="1269752">
+                  <a:extLst>
+                    <a:ext uri="{9D8B030D-6E8A-4147-A177-3AD203B41FA5}">
+                      <a16:colId xmlns:a16="http://schemas.microsoft.com/office/drawing/2014/main" val="20000"/>
+                    </a:ext>
+                  </a:extLst>
+                </a:gridCol>
+                <a:gridCol w="1360448">
+                  <a:extLst>
+                    <a:ext uri="{9D8B030D-6E8A-4147-A177-3AD203B41FA5}">
+                      <a16:colId xmlns:a16="http://schemas.microsoft.com/office/drawing/2014/main" val="20001"/>
+                    </a:ext>
+                  </a:extLst>
+                </a:gridCol>
+                <a:gridCol w="1269752">
+                  <a:extLst>
+                    <a:ext uri="{9D8B030D-6E8A-4147-A177-3AD203B41FA5}">
+                      <a16:colId xmlns:a16="http://schemas.microsoft.com/office/drawing/2014/main" val="20002"/>
+                    </a:ext>
+                  </a:extLst>
+                </a:gridCol>
+                <a:gridCol w="1360448">
+                  <a:extLst>
+                    <a:ext uri="{9D8B030D-6E8A-4147-A177-3AD203B41FA5}">
+                      <a16:colId xmlns:a16="http://schemas.microsoft.com/office/drawing/2014/main" val="20003"/>
+                    </a:ext>
+                  </a:extLst>
+                </a:gridCol>
+                <a:gridCol w="1269752">
+                  <a:extLst>
+                    <a:ext uri="{9D8B030D-6E8A-4147-A177-3AD203B41FA5}">
+                      <a16:colId xmlns:a16="http://schemas.microsoft.com/office/drawing/2014/main" val="20004"/>
+                    </a:ext>
+                  </a:extLst>
+                </a:gridCol>
+                <a:gridCol w="1723235">
+                  <a:extLst>
+                    <a:ext uri="{9D8B030D-6E8A-4147-A177-3AD203B41FA5}">
+                      <a16:colId xmlns:a16="http://schemas.microsoft.com/office/drawing/2014/main" val="20005"/>
+                    </a:ext>
+                  </a:extLst>
+                </a:gridCol>
+                <a:gridCol w="1541841">
+                  <a:extLst>
+                    <a:ext uri="{9D8B030D-6E8A-4147-A177-3AD203B41FA5}">
+                      <a16:colId xmlns:a16="http://schemas.microsoft.com/office/drawing/2014/main" val="20006"/>
+                    </a:ext>
+                  </a:extLst>
+                </a:gridCol>
+                <a:gridCol w="1360448">
+                  <a:extLst>
+                    <a:ext uri="{9D8B030D-6E8A-4147-A177-3AD203B41FA5}">
+                      <a16:colId xmlns:a16="http://schemas.microsoft.com/office/drawing/2014/main" val="20007"/>
+                    </a:ext>
+                  </a:extLst>
+                </a:gridCol>
               </a:tblGrid>
               <a:tr h="457200">
                 <a:tc>
                   <a:txBody>
-                    <a:bodyPr wrap="square"/>
+                    <a:bodyPr/>
                     <a:lstStyle/>
                     <a:p>
                       <a:pPr algn="l">
@@ -5550,7 +5317,7 @@
                 </a:tc>
                 <a:tc>
                   <a:txBody>
-                    <a:bodyPr wrap="square"/>
+                    <a:bodyPr/>
                     <a:lstStyle/>
                     <a:p>
                       <a:pPr algn="l">
@@ -5577,7 +5344,7 @@
                 </a:tc>
                 <a:tc>
                   <a:txBody>
-                    <a:bodyPr wrap="square"/>
+                    <a:bodyPr/>
                     <a:lstStyle/>
                     <a:p>
                       <a:pPr algn="l">
@@ -5604,7 +5371,7 @@
                 </a:tc>
                 <a:tc>
                   <a:txBody>
-                    <a:bodyPr wrap="square"/>
+                    <a:bodyPr/>
                     <a:lstStyle/>
                     <a:p>
                       <a:pPr algn="l">
@@ -5631,7 +5398,7 @@
                 </a:tc>
                 <a:tc>
                   <a:txBody>
-                    <a:bodyPr wrap="square"/>
+                    <a:bodyPr/>
                     <a:lstStyle/>
                     <a:p>
                       <a:pPr algn="l">
@@ -5658,7 +5425,7 @@
                 </a:tc>
                 <a:tc>
                   <a:txBody>
-                    <a:bodyPr wrap="square"/>
+                    <a:bodyPr/>
                     <a:lstStyle/>
                     <a:p>
                       <a:pPr algn="l">
@@ -5685,7 +5452,7 @@
                 </a:tc>
                 <a:tc>
                   <a:txBody>
-                    <a:bodyPr wrap="square"/>
+                    <a:bodyPr/>
                     <a:lstStyle/>
                     <a:p>
                       <a:pPr algn="l">
@@ -5712,7 +5479,7 @@
                 </a:tc>
                 <a:tc>
                   <a:txBody>
-                    <a:bodyPr wrap="square"/>
+                    <a:bodyPr/>
                     <a:lstStyle/>
                     <a:p>
                       <a:pPr algn="l">
@@ -5737,11 +5504,16 @@
                     </a:solidFill>
                   </a:tcPr>
                 </a:tc>
+                <a:extLst>
+                  <a:ext uri="{0D108BD9-81ED-4DB2-BD59-A6C34878D82A}">
+                    <a16:rowId xmlns:a16="http://schemas.microsoft.com/office/drawing/2014/main" val="10000"/>
+                  </a:ext>
+                </a:extLst>
               </a:tr>
               <a:tr h="457200">
                 <a:tc>
                   <a:txBody>
-                    <a:bodyPr wrap="square"/>
+                    <a:bodyPr/>
                     <a:lstStyle/>
                     <a:p>
                       <a:pPr algn="l">
@@ -5768,7 +5540,7 @@
                 </a:tc>
                 <a:tc>
                   <a:txBody>
-                    <a:bodyPr wrap="square"/>
+                    <a:bodyPr/>
                     <a:lstStyle/>
                     <a:p>
                       <a:pPr algn="l">
@@ -5795,7 +5567,7 @@
                 </a:tc>
                 <a:tc>
                   <a:txBody>
-                    <a:bodyPr wrap="square"/>
+                    <a:bodyPr/>
                     <a:lstStyle/>
                     <a:p>
                       <a:pPr algn="l">
@@ -5822,7 +5594,7 @@
                 </a:tc>
                 <a:tc>
                   <a:txBody>
-                    <a:bodyPr wrap="square"/>
+                    <a:bodyPr/>
                     <a:lstStyle/>
                     <a:p>
                       <a:pPr algn="l">
@@ -5849,7 +5621,7 @@
                 </a:tc>
                 <a:tc>
                   <a:txBody>
-                    <a:bodyPr wrap="square"/>
+                    <a:bodyPr/>
                     <a:lstStyle/>
                     <a:p>
                       <a:pPr algn="l">
@@ -5876,7 +5648,7 @@
                 </a:tc>
                 <a:tc>
                   <a:txBody>
-                    <a:bodyPr wrap="square"/>
+                    <a:bodyPr/>
                     <a:lstStyle/>
                     <a:p>
                       <a:pPr algn="l">
@@ -5903,7 +5675,7 @@
                 </a:tc>
                 <a:tc>
                   <a:txBody>
-                    <a:bodyPr wrap="square"/>
+                    <a:bodyPr/>
                     <a:lstStyle/>
                     <a:p>
                       <a:pPr algn="l">
@@ -5930,7 +5702,7 @@
                 </a:tc>
                 <a:tc>
                   <a:txBody>
-                    <a:bodyPr wrap="square"/>
+                    <a:bodyPr/>
                     <a:lstStyle/>
                     <a:p>
                       <a:pPr algn="l">
@@ -5955,6 +5727,11 @@
                     </a:solidFill>
                   </a:tcPr>
                 </a:tc>
+                <a:extLst>
+                  <a:ext uri="{0D108BD9-81ED-4DB2-BD59-A6C34878D82A}">
+                    <a16:rowId xmlns:a16="http://schemas.microsoft.com/office/drawing/2014/main" val="10001"/>
+                  </a:ext>
+                </a:extLst>
               </a:tr>
             </a:tbl>
           </a:graphicData>
@@ -6026,7 +5803,7 @@
 </file>
 
 <file path=ppt/slides/slide11.xml><?xml version="1.0" encoding="utf-8"?>
-<p:sld xmlns:a="http://schemas.openxmlformats.org/drawingml/2006/main" xmlns:p="http://schemas.openxmlformats.org/presentationml/2006/main" xmlns:r="http://schemas.openxmlformats.org/officeDocument/2006/relationships">
+<p:sld xmlns:a="http://schemas.openxmlformats.org/drawingml/2006/main" xmlns:r="http://schemas.openxmlformats.org/officeDocument/2006/relationships" xmlns:p="http://schemas.openxmlformats.org/presentationml/2006/main">
   <p:cSld>
     <p:spTree>
       <p:nvGrpSpPr>
@@ -6034,7 +5811,14 @@
         <p:cNvGrpSpPr/>
         <p:nvPr/>
       </p:nvGrpSpPr>
-      <p:grpSpPr/>
+      <p:grpSpPr>
+        <a:xfrm>
+          <a:off x="0" y="0"/>
+          <a:ext cx="0" cy="0"/>
+          <a:chOff x="0" y="0"/>
+          <a:chExt cx="0" cy="0"/>
+        </a:xfrm>
+      </p:grpSpPr>
       <p:sp>
         <p:nvSpPr>
           <p:cNvPr id="2" name="Rectangle 1"/>
@@ -6076,6 +5860,7 @@
           <a:lstStyle/>
           <a:p>
             <a:pPr algn="ctr"/>
+            <a:endParaRPr/>
           </a:p>
         </p:txBody>
       </p:sp>
@@ -6155,7 +5940,7 @@
           </a:fontRef>
         </p:style>
         <p:txBody>
-          <a:bodyPr rtlCol="0" anchor="ctr" wrap="square"/>
+          <a:bodyPr wrap="square" rtlCol="0" anchor="ctr"/>
           <a:lstStyle/>
           <a:p>
             <a:pPr algn="ctr">
@@ -6294,6 +6079,7 @@
           <a:lstStyle/>
           <a:p>
             <a:pPr algn="ctr"/>
+            <a:endParaRPr/>
           </a:p>
         </p:txBody>
       </p:sp>
@@ -6338,6 +6124,7 @@
           <a:lstStyle/>
           <a:p>
             <a:pPr algn="ctr"/>
+            <a:endParaRPr/>
           </a:p>
         </p:txBody>
       </p:sp>
@@ -6595,6 +6382,12 @@
                 <a:spcPts val="400"/>
               </a:spcAft>
             </a:pPr>
+            <a:endParaRPr sz="1500" b="0">
+              <a:solidFill>
+                <a:srgbClr val="1D2420"/>
+              </a:solidFill>
+              <a:latin typeface="Calibri"/>
+            </a:endParaRPr>
           </a:p>
           <a:p>
             <a:pPr algn="l">
@@ -6655,6 +6448,7 @@
           <a:lstStyle/>
           <a:p>
             <a:pPr algn="ctr"/>
+            <a:endParaRPr/>
           </a:p>
         </p:txBody>
       </p:sp>
@@ -6699,6 +6493,7 @@
           <a:lstStyle/>
           <a:p>
             <a:pPr algn="ctr"/>
+            <a:endParaRPr/>
           </a:p>
         </p:txBody>
       </p:sp>
@@ -6956,6 +6751,12 @@
                 <a:spcPts val="400"/>
               </a:spcAft>
             </a:pPr>
+            <a:endParaRPr sz="1500" b="0">
+              <a:solidFill>
+                <a:srgbClr val="1D2420"/>
+              </a:solidFill>
+              <a:latin typeface="Calibri"/>
+            </a:endParaRPr>
           </a:p>
           <a:p>
             <a:pPr algn="l">
@@ -6984,7 +6785,7 @@
 </file>
 
 <file path=ppt/slides/slide12.xml><?xml version="1.0" encoding="utf-8"?>
-<p:sld xmlns:a="http://schemas.openxmlformats.org/drawingml/2006/main" xmlns:p="http://schemas.openxmlformats.org/presentationml/2006/main" xmlns:r="http://schemas.openxmlformats.org/officeDocument/2006/relationships">
+<p:sld xmlns:a="http://schemas.openxmlformats.org/drawingml/2006/main" xmlns:r="http://schemas.openxmlformats.org/officeDocument/2006/relationships" xmlns:p="http://schemas.openxmlformats.org/presentationml/2006/main">
   <p:cSld>
     <p:spTree>
       <p:nvGrpSpPr>
@@ -6992,7 +6793,14 @@
         <p:cNvGrpSpPr/>
         <p:nvPr/>
       </p:nvGrpSpPr>
-      <p:grpSpPr/>
+      <p:grpSpPr>
+        <a:xfrm>
+          <a:off x="0" y="0"/>
+          <a:ext cx="0" cy="0"/>
+          <a:chOff x="0" y="0"/>
+          <a:chExt cx="0" cy="0"/>
+        </a:xfrm>
+      </p:grpSpPr>
       <p:sp>
         <p:nvSpPr>
           <p:cNvPr id="2" name="Rectangle 1"/>
@@ -7034,6 +6842,7 @@
           <a:lstStyle/>
           <a:p>
             <a:pPr algn="ctr"/>
+            <a:endParaRPr/>
           </a:p>
         </p:txBody>
       </p:sp>
@@ -7113,7 +6922,7 @@
           </a:fontRef>
         </p:style>
         <p:txBody>
-          <a:bodyPr rtlCol="0" anchor="ctr" wrap="square"/>
+          <a:bodyPr wrap="square" rtlCol="0" anchor="ctr"/>
           <a:lstStyle/>
           <a:p>
             <a:pPr algn="ctr">
@@ -7252,6 +7061,7 @@
           <a:lstStyle/>
           <a:p>
             <a:pPr algn="ctr"/>
+            <a:endParaRPr/>
           </a:p>
         </p:txBody>
       </p:sp>
@@ -7296,6 +7106,7 @@
           <a:lstStyle/>
           <a:p>
             <a:pPr algn="ctr"/>
+            <a:endParaRPr/>
           </a:p>
         </p:txBody>
       </p:sp>
@@ -7438,6 +7249,12 @@
                 <a:spcPts val="400"/>
               </a:spcAft>
             </a:pPr>
+            <a:endParaRPr sz="1500" b="1">
+              <a:solidFill>
+                <a:srgbClr val="1D2420"/>
+              </a:solidFill>
+              <a:latin typeface="Calibri"/>
+            </a:endParaRPr>
           </a:p>
           <a:p>
             <a:pPr algn="l">
@@ -7507,6 +7324,7 @@
           <a:lstStyle/>
           <a:p>
             <a:pPr algn="ctr"/>
+            <a:endParaRPr/>
           </a:p>
         </p:txBody>
       </p:sp>
@@ -7551,6 +7369,7 @@
           <a:lstStyle/>
           <a:p>
             <a:pPr algn="ctr"/>
+            <a:endParaRPr/>
           </a:p>
         </p:txBody>
       </p:sp>
@@ -7747,6 +7566,12 @@
                 <a:spcPts val="400"/>
               </a:spcAft>
             </a:pPr>
+            <a:endParaRPr sz="1500" b="0">
+              <a:solidFill>
+                <a:srgbClr val="1D2420"/>
+              </a:solidFill>
+              <a:latin typeface="Calibri"/>
+            </a:endParaRPr>
           </a:p>
           <a:p>
             <a:pPr algn="l">
@@ -7775,7 +7600,7 @@
 </file>
 
 <file path=ppt/slides/slide13.xml><?xml version="1.0" encoding="utf-8"?>
-<p:sld xmlns:a="http://schemas.openxmlformats.org/drawingml/2006/main" xmlns:p="http://schemas.openxmlformats.org/presentationml/2006/main" xmlns:r="http://schemas.openxmlformats.org/officeDocument/2006/relationships">
+<p:sld xmlns:a="http://schemas.openxmlformats.org/drawingml/2006/main" xmlns:r="http://schemas.openxmlformats.org/officeDocument/2006/relationships" xmlns:p="http://schemas.openxmlformats.org/presentationml/2006/main">
   <p:cSld>
     <p:spTree>
       <p:nvGrpSpPr>
@@ -7783,7 +7608,14 @@
         <p:cNvGrpSpPr/>
         <p:nvPr/>
       </p:nvGrpSpPr>
-      <p:grpSpPr/>
+      <p:grpSpPr>
+        <a:xfrm>
+          <a:off x="0" y="0"/>
+          <a:ext cx="0" cy="0"/>
+          <a:chOff x="0" y="0"/>
+          <a:chExt cx="0" cy="0"/>
+        </a:xfrm>
+      </p:grpSpPr>
       <p:sp>
         <p:nvSpPr>
           <p:cNvPr id="2" name="Rectangle 1"/>
@@ -7825,6 +7657,7 @@
           <a:lstStyle/>
           <a:p>
             <a:pPr algn="ctr"/>
+            <a:endParaRPr/>
           </a:p>
         </p:txBody>
       </p:sp>
@@ -7904,7 +7737,7 @@
           </a:fontRef>
         </p:style>
         <p:txBody>
-          <a:bodyPr rtlCol="0" anchor="ctr" wrap="square"/>
+          <a:bodyPr wrap="square" rtlCol="0" anchor="ctr"/>
           <a:lstStyle/>
           <a:p>
             <a:pPr algn="ctr">
@@ -8174,6 +8007,12 @@
                 <a:spcPts val="600"/>
               </a:spcAft>
             </a:pPr>
+            <a:endParaRPr sz="1600" b="0">
+              <a:solidFill>
+                <a:srgbClr val="1D2420"/>
+              </a:solidFill>
+              <a:latin typeface="Calibri"/>
+            </a:endParaRPr>
           </a:p>
           <a:p>
             <a:pPr algn="l">
@@ -8252,7 +8091,7 @@
 </file>
 
 <file path=ppt/slides/slide14.xml><?xml version="1.0" encoding="utf-8"?>
-<p:sld xmlns:a="http://schemas.openxmlformats.org/drawingml/2006/main" xmlns:p="http://schemas.openxmlformats.org/presentationml/2006/main" xmlns:r="http://schemas.openxmlformats.org/officeDocument/2006/relationships">
+<p:sld xmlns:a="http://schemas.openxmlformats.org/drawingml/2006/main" xmlns:r="http://schemas.openxmlformats.org/officeDocument/2006/relationships" xmlns:p="http://schemas.openxmlformats.org/presentationml/2006/main">
   <p:cSld>
     <p:spTree>
       <p:nvGrpSpPr>
@@ -8260,7 +8099,14 @@
         <p:cNvGrpSpPr/>
         <p:nvPr/>
       </p:nvGrpSpPr>
-      <p:grpSpPr/>
+      <p:grpSpPr>
+        <a:xfrm>
+          <a:off x="0" y="0"/>
+          <a:ext cx="0" cy="0"/>
+          <a:chOff x="0" y="0"/>
+          <a:chExt cx="0" cy="0"/>
+        </a:xfrm>
+      </p:grpSpPr>
       <p:sp>
         <p:nvSpPr>
           <p:cNvPr id="2" name="Rectangle 1"/>
@@ -8302,6 +8148,7 @@
           <a:lstStyle/>
           <a:p>
             <a:pPr algn="ctr"/>
+            <a:endParaRPr/>
           </a:p>
         </p:txBody>
       </p:sp>
@@ -8381,7 +8228,7 @@
           </a:fontRef>
         </p:style>
         <p:txBody>
-          <a:bodyPr rtlCol="0" anchor="ctr" wrap="square"/>
+          <a:bodyPr wrap="square" rtlCol="0" anchor="ctr"/>
           <a:lstStyle/>
           <a:p>
             <a:pPr algn="ctr">
@@ -8520,6 +8367,7 @@
           <a:lstStyle/>
           <a:p>
             <a:pPr algn="ctr"/>
+            <a:endParaRPr/>
           </a:p>
         </p:txBody>
       </p:sp>
@@ -8642,6 +8490,7 @@
           <a:lstStyle/>
           <a:p>
             <a:pPr algn="ctr"/>
+            <a:endParaRPr/>
           </a:p>
         </p:txBody>
       </p:sp>
@@ -8764,6 +8613,7 @@
           <a:lstStyle/>
           <a:p>
             <a:pPr algn="ctr"/>
+            <a:endParaRPr/>
           </a:p>
         </p:txBody>
       </p:sp>
@@ -8897,6 +8747,12 @@
                 <a:spcPts val="600"/>
               </a:spcAft>
             </a:pPr>
+            <a:endParaRPr sz="1500" b="0">
+              <a:solidFill>
+                <a:srgbClr val="1D2420"/>
+              </a:solidFill>
+              <a:latin typeface="Calibri"/>
+            </a:endParaRPr>
           </a:p>
           <a:p>
             <a:pPr algn="l">
@@ -9018,7 +8874,7 @@
 </file>
 
 <file path=ppt/slides/slide15.xml><?xml version="1.0" encoding="utf-8"?>
-<p:sld xmlns:a="http://schemas.openxmlformats.org/drawingml/2006/main" xmlns:p="http://schemas.openxmlformats.org/presentationml/2006/main" xmlns:r="http://schemas.openxmlformats.org/officeDocument/2006/relationships">
+<p:sld xmlns:a="http://schemas.openxmlformats.org/drawingml/2006/main" xmlns:r="http://schemas.openxmlformats.org/officeDocument/2006/relationships" xmlns:p="http://schemas.openxmlformats.org/presentationml/2006/main">
   <p:cSld>
     <p:spTree>
       <p:nvGrpSpPr>
@@ -9026,7 +8882,14 @@
         <p:cNvGrpSpPr/>
         <p:nvPr/>
       </p:nvGrpSpPr>
-      <p:grpSpPr/>
+      <p:grpSpPr>
+        <a:xfrm>
+          <a:off x="0" y="0"/>
+          <a:ext cx="0" cy="0"/>
+          <a:chOff x="0" y="0"/>
+          <a:chExt cx="0" cy="0"/>
+        </a:xfrm>
+      </p:grpSpPr>
       <p:sp>
         <p:nvSpPr>
           <p:cNvPr id="2" name="Rectangle 1"/>
@@ -9036,7 +8899,7 @@
         <p:spPr>
           <a:xfrm>
             <a:off x="0" y="0"/>
-            <a:ext cx="164592" cy="6858000"/>
+            <a:ext cx="12191695" cy="6858000"/>
           </a:xfrm>
           <a:prstGeom prst="rect">
             <a:avLst/>
@@ -9068,1091 +8931,7 @@
           <a:lstStyle/>
           <a:p>
             <a:pPr algn="ctr"/>
-          </a:p>
-        </p:txBody>
-      </p:sp>
-      <p:sp>
-        <p:nvSpPr>
-          <p:cNvPr id="3" name="TextBox 2"/>
-          <p:cNvSpPr txBox="1"/>
-          <p:nvPr/>
-        </p:nvSpPr>
-        <p:spPr>
-          <a:xfrm>
-            <a:off x="502920" y="320040"/>
-            <a:ext cx="9326880" cy="822960"/>
-          </a:xfrm>
-          <a:prstGeom prst="rect">
-            <a:avLst/>
-          </a:prstGeom>
-          <a:noFill/>
-        </p:spPr>
-        <p:txBody>
-          <a:bodyPr wrap="square" lIns="45720" rIns="45720">
-            <a:spAutoFit/>
-          </a:bodyPr>
-          <a:lstStyle/>
-          <a:p>
-            <a:pPr algn="l">
-              <a:spcAft>
-                <a:spcPts val="600"/>
-              </a:spcAft>
-            </a:pPr>
-            <a:r>
-              <a:rPr sz="3000" b="1">
-                <a:solidFill>
-                  <a:srgbClr val="1D2420"/>
-                </a:solidFill>
-                <a:latin typeface="Calibri"/>
-              </a:rPr>
-              <a:t>Demostración: abasto de un producto</a:t>
-            </a:r>
-          </a:p>
-        </p:txBody>
-      </p:sp>
-      <p:sp>
-        <p:nvSpPr>
-          <p:cNvPr id="4" name="TextBox 3"/>
-          <p:cNvSpPr txBox="1"/>
-          <p:nvPr/>
-        </p:nvSpPr>
-        <p:spPr>
-          <a:xfrm>
-            <a:off x="502920" y="1005840"/>
-            <a:ext cx="10515600" cy="457200"/>
-          </a:xfrm>
-          <a:prstGeom prst="rect">
-            <a:avLst/>
-          </a:prstGeom>
-          <a:noFill/>
-        </p:spPr>
-        <p:txBody>
-          <a:bodyPr wrap="square" lIns="45720" rIns="45720">
-            <a:spAutoFit/>
-          </a:bodyPr>
-          <a:lstStyle/>
-          <a:p>
-            <a:pPr algn="l">
-              <a:spcAft>
-                <a:spcPts val="600"/>
-              </a:spcAft>
-            </a:pPr>
-            <a:r>
-              <a:rPr sz="1600" b="0">
-                <a:solidFill>
-                  <a:srgbClr val="5F6B64"/>
-                </a:solidFill>
-                <a:latin typeface="Calibri"/>
-              </a:rPr>
-              <a:t>El proceso completo, de punta a punta</a:t>
-            </a:r>
-          </a:p>
-        </p:txBody>
-      </p:sp>
-      <p:sp>
-        <p:nvSpPr>
-          <p:cNvPr id="5" name="Rounded Rectangle 4"/>
-          <p:cNvSpPr/>
-          <p:nvPr/>
-        </p:nvSpPr>
-        <p:spPr>
-          <a:xfrm>
-            <a:off x="10149840" y="411480"/>
-            <a:ext cx="1691640" cy="384048"/>
-          </a:xfrm>
-          <a:prstGeom prst="roundRect">
-            <a:avLst/>
-          </a:prstGeom>
-          <a:solidFill>
-            <a:srgbClr val="1F6F4A"/>
-          </a:solidFill>
-          <a:ln>
-            <a:noFill/>
-          </a:ln>
-          <a:effectLst/>
-        </p:spPr>
-        <p:style>
-          <a:lnRef idx="1">
-            <a:schemeClr val="accent1"/>
-          </a:lnRef>
-          <a:fillRef idx="3">
-            <a:schemeClr val="accent1"/>
-          </a:fillRef>
-          <a:effectRef idx="2">
-            <a:schemeClr val="accent1"/>
-          </a:effectRef>
-          <a:fontRef idx="minor">
-            <a:schemeClr val="lt1"/>
-          </a:fontRef>
-        </p:style>
-        <p:txBody>
-          <a:bodyPr rtlCol="0" anchor="ctr" wrap="square"/>
-          <a:lstStyle/>
-          <a:p>
-            <a:pPr algn="ctr">
-              <a:spcAft>
-                <a:spcPts val="0"/>
-              </a:spcAft>
-            </a:pPr>
-            <a:r>
-              <a:rPr sz="1300" b="1">
-                <a:solidFill>
-                  <a:srgbClr val="FFFFFF"/>
-                </a:solidFill>
-                <a:latin typeface="Calibri"/>
-              </a:rPr>
-              <a:t>Todos</a:t>
-            </a:r>
-          </a:p>
-        </p:txBody>
-      </p:sp>
-      <p:sp>
-        <p:nvSpPr>
-          <p:cNvPr id="6" name="TextBox 5"/>
-          <p:cNvSpPr txBox="1"/>
-          <p:nvPr/>
-        </p:nvSpPr>
-        <p:spPr>
-          <a:xfrm>
-            <a:off x="502920" y="6400800"/>
-            <a:ext cx="8229600" cy="320040"/>
-          </a:xfrm>
-          <a:prstGeom prst="rect">
-            <a:avLst/>
-          </a:prstGeom>
-          <a:noFill/>
-        </p:spPr>
-        <p:txBody>
-          <a:bodyPr wrap="square" lIns="45720" rIns="45720">
-            <a:spAutoFit/>
-          </a:bodyPr>
-          <a:lstStyle/>
-          <a:p>
-            <a:pPr algn="l">
-              <a:spcAft>
-                <a:spcPts val="600"/>
-              </a:spcAft>
-            </a:pPr>
-            <a:r>
-              <a:rPr sz="1000" b="0">
-                <a:solidFill>
-                  <a:srgbClr val="5F6B64"/>
-                </a:solidFill>
-                <a:latin typeface="Calibri"/>
-              </a:rPr>
-              <a:t>AbastoRed · Proyecto 14 · Equipo 01 · Avance 2</a:t>
-            </a:r>
-          </a:p>
-        </p:txBody>
-      </p:sp>
-      <p:sp>
-        <p:nvSpPr>
-          <p:cNvPr id="7" name="TextBox 6"/>
-          <p:cNvSpPr txBox="1"/>
-          <p:nvPr/>
-        </p:nvSpPr>
-        <p:spPr>
-          <a:xfrm>
-            <a:off x="11155680" y="6400800"/>
-            <a:ext cx="731520" cy="320040"/>
-          </a:xfrm>
-          <a:prstGeom prst="rect">
-            <a:avLst/>
-          </a:prstGeom>
-          <a:noFill/>
-        </p:spPr>
-        <p:txBody>
-          <a:bodyPr wrap="square" lIns="45720" rIns="45720">
-            <a:spAutoFit/>
-          </a:bodyPr>
-          <a:lstStyle/>
-          <a:p>
-            <a:pPr algn="r">
-              <a:spcAft>
-                <a:spcPts val="600"/>
-              </a:spcAft>
-            </a:pPr>
-            <a:r>
-              <a:rPr sz="1000" b="0">
-                <a:solidFill>
-                  <a:srgbClr val="5F6B64"/>
-                </a:solidFill>
-                <a:latin typeface="Calibri"/>
-              </a:rPr>
-              <a:t>15</a:t>
-            </a:r>
-          </a:p>
-        </p:txBody>
-      </p:sp>
-      <p:sp>
-        <p:nvSpPr>
-          <p:cNvPr id="8" name="Oval 7"/>
-          <p:cNvSpPr/>
-          <p:nvPr/>
-        </p:nvSpPr>
-        <p:spPr>
-          <a:xfrm>
-            <a:off x="640080" y="1691640"/>
-            <a:ext cx="548640" cy="548640"/>
-          </a:xfrm>
-          <a:prstGeom prst="ellipse">
-            <a:avLst/>
-          </a:prstGeom>
-          <a:solidFill>
-            <a:srgbClr val="1F6F4A"/>
-          </a:solidFill>
-          <a:ln>
-            <a:noFill/>
-          </a:ln>
-          <a:effectLst/>
-        </p:spPr>
-        <p:style>
-          <a:lnRef idx="1">
-            <a:schemeClr val="accent1"/>
-          </a:lnRef>
-          <a:fillRef idx="3">
-            <a:schemeClr val="accent1"/>
-          </a:fillRef>
-          <a:effectRef idx="2">
-            <a:schemeClr val="accent1"/>
-          </a:effectRef>
-          <a:fontRef idx="minor">
-            <a:schemeClr val="lt1"/>
-          </a:fontRef>
-        </p:style>
-        <p:txBody>
-          <a:bodyPr rtlCol="0" anchor="ctr" wrap="square"/>
-          <a:lstStyle/>
-          <a:p>
-            <a:pPr algn="ctr">
-              <a:spcAft>
-                <a:spcPts val="0"/>
-              </a:spcAft>
-            </a:pPr>
-            <a:r>
-              <a:rPr sz="1800" b="1">
-                <a:solidFill>
-                  <a:srgbClr val="FFFFFF"/>
-                </a:solidFill>
-                <a:latin typeface="Calibri"/>
-              </a:rPr>
-              <a:t>1</a:t>
-            </a:r>
-          </a:p>
-        </p:txBody>
-      </p:sp>
-      <p:sp>
-        <p:nvSpPr>
-          <p:cNvPr id="9" name="TextBox 8"/>
-          <p:cNvSpPr txBox="1"/>
-          <p:nvPr/>
-        </p:nvSpPr>
-        <p:spPr>
-          <a:xfrm>
-            <a:off x="1417320" y="1764792"/>
-            <a:ext cx="1828800" cy="457200"/>
-          </a:xfrm>
-          <a:prstGeom prst="rect">
-            <a:avLst/>
-          </a:prstGeom>
-          <a:noFill/>
-        </p:spPr>
-        <p:txBody>
-          <a:bodyPr wrap="square" lIns="45720" rIns="45720">
-            <a:spAutoFit/>
-          </a:bodyPr>
-          <a:lstStyle/>
-          <a:p>
-            <a:pPr algn="l">
-              <a:spcAft>
-                <a:spcPts val="600"/>
-              </a:spcAft>
-            </a:pPr>
-            <a:r>
-              <a:rPr sz="1700" b="1">
-                <a:solidFill>
-                  <a:srgbClr val="1F6F4A"/>
-                </a:solidFill>
-                <a:latin typeface="Calibri"/>
-              </a:rPr>
-              <a:t>Minorista</a:t>
-            </a:r>
-          </a:p>
-        </p:txBody>
-      </p:sp>
-      <p:sp>
-        <p:nvSpPr>
-          <p:cNvPr id="10" name="TextBox 9"/>
-          <p:cNvSpPr txBox="1"/>
-          <p:nvPr/>
-        </p:nvSpPr>
-        <p:spPr>
-          <a:xfrm>
-            <a:off x="3200400" y="1764792"/>
-            <a:ext cx="8503920" cy="457200"/>
-          </a:xfrm>
-          <a:prstGeom prst="rect">
-            <a:avLst/>
-          </a:prstGeom>
-          <a:noFill/>
-        </p:spPr>
-        <p:txBody>
-          <a:bodyPr wrap="square" lIns="45720" rIns="45720">
-            <a:spAutoFit/>
-          </a:bodyPr>
-          <a:lstStyle/>
-          <a:p>
-            <a:pPr algn="l">
-              <a:spcAft>
-                <a:spcPts val="600"/>
-              </a:spcAft>
-            </a:pPr>
-            <a:r>
-              <a:rPr sz="1700" b="0">
-                <a:solidFill>
-                  <a:srgbClr val="1D2420"/>
-                </a:solidFill>
-                <a:latin typeface="Calibri"/>
-              </a:rPr>
-              <a:t>Vende y el aceite queda bajo el mínimo → llega un aviso</a:t>
-            </a:r>
-          </a:p>
-        </p:txBody>
-      </p:sp>
-      <p:sp>
-        <p:nvSpPr>
-          <p:cNvPr id="11" name="Oval 10"/>
-          <p:cNvSpPr/>
-          <p:nvPr/>
-        </p:nvSpPr>
-        <p:spPr>
-          <a:xfrm>
-            <a:off x="640080" y="2423160"/>
-            <a:ext cx="548640" cy="548640"/>
-          </a:xfrm>
-          <a:prstGeom prst="ellipse">
-            <a:avLst/>
-          </a:prstGeom>
-          <a:solidFill>
-            <a:srgbClr val="1F6F4A"/>
-          </a:solidFill>
-          <a:ln>
-            <a:noFill/>
-          </a:ln>
-          <a:effectLst/>
-        </p:spPr>
-        <p:style>
-          <a:lnRef idx="1">
-            <a:schemeClr val="accent1"/>
-          </a:lnRef>
-          <a:fillRef idx="3">
-            <a:schemeClr val="accent1"/>
-          </a:fillRef>
-          <a:effectRef idx="2">
-            <a:schemeClr val="accent1"/>
-          </a:effectRef>
-          <a:fontRef idx="minor">
-            <a:schemeClr val="lt1"/>
-          </a:fontRef>
-        </p:style>
-        <p:txBody>
-          <a:bodyPr rtlCol="0" anchor="ctr" wrap="square"/>
-          <a:lstStyle/>
-          <a:p>
-            <a:pPr algn="ctr">
-              <a:spcAft>
-                <a:spcPts val="0"/>
-              </a:spcAft>
-            </a:pPr>
-            <a:r>
-              <a:rPr sz="1800" b="1">
-                <a:solidFill>
-                  <a:srgbClr val="FFFFFF"/>
-                </a:solidFill>
-                <a:latin typeface="Calibri"/>
-              </a:rPr>
-              <a:t>2</a:t>
-            </a:r>
-          </a:p>
-        </p:txBody>
-      </p:sp>
-      <p:sp>
-        <p:nvSpPr>
-          <p:cNvPr id="12" name="TextBox 11"/>
-          <p:cNvSpPr txBox="1"/>
-          <p:nvPr/>
-        </p:nvSpPr>
-        <p:spPr>
-          <a:xfrm>
-            <a:off x="1417320" y="2496312"/>
-            <a:ext cx="1828800" cy="457200"/>
-          </a:xfrm>
-          <a:prstGeom prst="rect">
-            <a:avLst/>
-          </a:prstGeom>
-          <a:noFill/>
-        </p:spPr>
-        <p:txBody>
-          <a:bodyPr wrap="square" lIns="45720" rIns="45720">
-            <a:spAutoFit/>
-          </a:bodyPr>
-          <a:lstStyle/>
-          <a:p>
-            <a:pPr algn="l">
-              <a:spcAft>
-                <a:spcPts val="600"/>
-              </a:spcAft>
-            </a:pPr>
-            <a:r>
-              <a:rPr sz="1700" b="1">
-                <a:solidFill>
-                  <a:srgbClr val="1F6F4A"/>
-                </a:solidFill>
-                <a:latin typeface="Calibri"/>
-              </a:rPr>
-              <a:t>Minorista</a:t>
-            </a:r>
-          </a:p>
-        </p:txBody>
-      </p:sp>
-      <p:sp>
-        <p:nvSpPr>
-          <p:cNvPr id="13" name="TextBox 12"/>
-          <p:cNvSpPr txBox="1"/>
-          <p:nvPr/>
-        </p:nvSpPr>
-        <p:spPr>
-          <a:xfrm>
-            <a:off x="3200400" y="2496312"/>
-            <a:ext cx="8503920" cy="457200"/>
-          </a:xfrm>
-          <a:prstGeom prst="rect">
-            <a:avLst/>
-          </a:prstGeom>
-          <a:noFill/>
-        </p:spPr>
-        <p:txBody>
-          <a:bodyPr wrap="square" lIns="45720" rIns="45720">
-            <a:spAutoFit/>
-          </a:bodyPr>
-          <a:lstStyle/>
-          <a:p>
-            <a:pPr algn="l">
-              <a:spcAft>
-                <a:spcPts val="600"/>
-              </a:spcAft>
-            </a:pPr>
-            <a:r>
-              <a:rPr sz="1700" b="0">
-                <a:solidFill>
-                  <a:srgbClr val="1D2420"/>
-                </a:solidFill>
-                <a:latin typeface="Calibri"/>
-              </a:rPr>
-              <a:t>Busca quién se lo vende en su zona y hace el pedido</a:t>
-            </a:r>
-          </a:p>
-        </p:txBody>
-      </p:sp>
-      <p:sp>
-        <p:nvSpPr>
-          <p:cNvPr id="14" name="Oval 13"/>
-          <p:cNvSpPr/>
-          <p:nvPr/>
-        </p:nvSpPr>
-        <p:spPr>
-          <a:xfrm>
-            <a:off x="640080" y="3154680"/>
-            <a:ext cx="548640" cy="548640"/>
-          </a:xfrm>
-          <a:prstGeom prst="ellipse">
-            <a:avLst/>
-          </a:prstGeom>
-          <a:solidFill>
-            <a:srgbClr val="1F6F4A"/>
-          </a:solidFill>
-          <a:ln>
-            <a:noFill/>
-          </a:ln>
-          <a:effectLst/>
-        </p:spPr>
-        <p:style>
-          <a:lnRef idx="1">
-            <a:schemeClr val="accent1"/>
-          </a:lnRef>
-          <a:fillRef idx="3">
-            <a:schemeClr val="accent1"/>
-          </a:fillRef>
-          <a:effectRef idx="2">
-            <a:schemeClr val="accent1"/>
-          </a:effectRef>
-          <a:fontRef idx="minor">
-            <a:schemeClr val="lt1"/>
-          </a:fontRef>
-        </p:style>
-        <p:txBody>
-          <a:bodyPr rtlCol="0" anchor="ctr" wrap="square"/>
-          <a:lstStyle/>
-          <a:p>
-            <a:pPr algn="ctr">
-              <a:spcAft>
-                <a:spcPts val="0"/>
-              </a:spcAft>
-            </a:pPr>
-            <a:r>
-              <a:rPr sz="1800" b="1">
-                <a:solidFill>
-                  <a:srgbClr val="FFFFFF"/>
-                </a:solidFill>
-                <a:latin typeface="Calibri"/>
-              </a:rPr>
-              <a:t>3</a:t>
-            </a:r>
-          </a:p>
-        </p:txBody>
-      </p:sp>
-      <p:sp>
-        <p:nvSpPr>
-          <p:cNvPr id="15" name="TextBox 14"/>
-          <p:cNvSpPr txBox="1"/>
-          <p:nvPr/>
-        </p:nvSpPr>
-        <p:spPr>
-          <a:xfrm>
-            <a:off x="1417320" y="3227832"/>
-            <a:ext cx="1828800" cy="457200"/>
-          </a:xfrm>
-          <a:prstGeom prst="rect">
-            <a:avLst/>
-          </a:prstGeom>
-          <a:noFill/>
-        </p:spPr>
-        <p:txBody>
-          <a:bodyPr wrap="square" lIns="45720" rIns="45720">
-            <a:spAutoFit/>
-          </a:bodyPr>
-          <a:lstStyle/>
-          <a:p>
-            <a:pPr algn="l">
-              <a:spcAft>
-                <a:spcPts val="600"/>
-              </a:spcAft>
-            </a:pPr>
-            <a:r>
-              <a:rPr sz="1700" b="1">
-                <a:solidFill>
-                  <a:srgbClr val="1F6F4A"/>
-                </a:solidFill>
-                <a:latin typeface="Calibri"/>
-              </a:rPr>
-              <a:t>Operador</a:t>
-            </a:r>
-          </a:p>
-        </p:txBody>
-      </p:sp>
-      <p:sp>
-        <p:nvSpPr>
-          <p:cNvPr id="16" name="TextBox 15"/>
-          <p:cNvSpPr txBox="1"/>
-          <p:nvPr/>
-        </p:nvSpPr>
-        <p:spPr>
-          <a:xfrm>
-            <a:off x="3200400" y="3227832"/>
-            <a:ext cx="8503920" cy="457200"/>
-          </a:xfrm>
-          <a:prstGeom prst="rect">
-            <a:avLst/>
-          </a:prstGeom>
-          <a:noFill/>
-        </p:spPr>
-        <p:txBody>
-          <a:bodyPr wrap="square" lIns="45720" rIns="45720">
-            <a:spAutoFit/>
-          </a:bodyPr>
-          <a:lstStyle/>
-          <a:p>
-            <a:pPr algn="l">
-              <a:spcAft>
-                <a:spcPts val="600"/>
-              </a:spcAft>
-            </a:pPr>
-            <a:r>
-              <a:rPr sz="1700" b="0">
-                <a:solidFill>
-                  <a:srgbClr val="1D2420"/>
-                </a:solidFill>
-                <a:latin typeface="Calibri"/>
-              </a:rPr>
-              <a:t>Recibe el aviso, acepta y prepara el pedido</a:t>
-            </a:r>
-          </a:p>
-        </p:txBody>
-      </p:sp>
-      <p:sp>
-        <p:nvSpPr>
-          <p:cNvPr id="17" name="Oval 16"/>
-          <p:cNvSpPr/>
-          <p:nvPr/>
-        </p:nvSpPr>
-        <p:spPr>
-          <a:xfrm>
-            <a:off x="640080" y="3886200"/>
-            <a:ext cx="548640" cy="548640"/>
-          </a:xfrm>
-          <a:prstGeom prst="ellipse">
-            <a:avLst/>
-          </a:prstGeom>
-          <a:solidFill>
-            <a:srgbClr val="1F6F4A"/>
-          </a:solidFill>
-          <a:ln>
-            <a:noFill/>
-          </a:ln>
-          <a:effectLst/>
-        </p:spPr>
-        <p:style>
-          <a:lnRef idx="1">
-            <a:schemeClr val="accent1"/>
-          </a:lnRef>
-          <a:fillRef idx="3">
-            <a:schemeClr val="accent1"/>
-          </a:fillRef>
-          <a:effectRef idx="2">
-            <a:schemeClr val="accent1"/>
-          </a:effectRef>
-          <a:fontRef idx="minor">
-            <a:schemeClr val="lt1"/>
-          </a:fontRef>
-        </p:style>
-        <p:txBody>
-          <a:bodyPr rtlCol="0" anchor="ctr" wrap="square"/>
-          <a:lstStyle/>
-          <a:p>
-            <a:pPr algn="ctr">
-              <a:spcAft>
-                <a:spcPts val="0"/>
-              </a:spcAft>
-            </a:pPr>
-            <a:r>
-              <a:rPr sz="1800" b="1">
-                <a:solidFill>
-                  <a:srgbClr val="FFFFFF"/>
-                </a:solidFill>
-                <a:latin typeface="Calibri"/>
-              </a:rPr>
-              <a:t>4</a:t>
-            </a:r>
-          </a:p>
-        </p:txBody>
-      </p:sp>
-      <p:sp>
-        <p:nvSpPr>
-          <p:cNvPr id="18" name="TextBox 17"/>
-          <p:cNvSpPr txBox="1"/>
-          <p:nvPr/>
-        </p:nvSpPr>
-        <p:spPr>
-          <a:xfrm>
-            <a:off x="1417320" y="3959352"/>
-            <a:ext cx="1828800" cy="457200"/>
-          </a:xfrm>
-          <a:prstGeom prst="rect">
-            <a:avLst/>
-          </a:prstGeom>
-          <a:noFill/>
-        </p:spPr>
-        <p:txBody>
-          <a:bodyPr wrap="square" lIns="45720" rIns="45720">
-            <a:spAutoFit/>
-          </a:bodyPr>
-          <a:lstStyle/>
-          <a:p>
-            <a:pPr algn="l">
-              <a:spcAft>
-                <a:spcPts val="600"/>
-              </a:spcAft>
-            </a:pPr>
-            <a:r>
-              <a:rPr sz="1700" b="1">
-                <a:solidFill>
-                  <a:srgbClr val="1F6F4A"/>
-                </a:solidFill>
-                <a:latin typeface="Calibri"/>
-              </a:rPr>
-              <a:t>Proveedor</a:t>
-            </a:r>
-          </a:p>
-        </p:txBody>
-      </p:sp>
-      <p:sp>
-        <p:nvSpPr>
-          <p:cNvPr id="19" name="TextBox 18"/>
-          <p:cNvSpPr txBox="1"/>
-          <p:nvPr/>
-        </p:nvSpPr>
-        <p:spPr>
-          <a:xfrm>
-            <a:off x="3200400" y="3959352"/>
-            <a:ext cx="8503920" cy="457200"/>
-          </a:xfrm>
-          <a:prstGeom prst="rect">
-            <a:avLst/>
-          </a:prstGeom>
-          <a:noFill/>
-        </p:spPr>
-        <p:txBody>
-          <a:bodyPr wrap="square" lIns="45720" rIns="45720">
-            <a:spAutoFit/>
-          </a:bodyPr>
-          <a:lstStyle/>
-          <a:p>
-            <a:pPr algn="l">
-              <a:spcAft>
-                <a:spcPts val="600"/>
-              </a:spcAft>
-            </a:pPr>
-            <a:r>
-              <a:rPr sz="1700" b="0">
-                <a:solidFill>
-                  <a:srgbClr val="1D2420"/>
-                </a:solidFill>
-                <a:latin typeface="Calibri"/>
-              </a:rPr>
-              <a:t>Lo despacha</a:t>
-            </a:r>
-          </a:p>
-        </p:txBody>
-      </p:sp>
-      <p:sp>
-        <p:nvSpPr>
-          <p:cNvPr id="20" name="Oval 19"/>
-          <p:cNvSpPr/>
-          <p:nvPr/>
-        </p:nvSpPr>
-        <p:spPr>
-          <a:xfrm>
-            <a:off x="640080" y="4617720"/>
-            <a:ext cx="548640" cy="548640"/>
-          </a:xfrm>
-          <a:prstGeom prst="ellipse">
-            <a:avLst/>
-          </a:prstGeom>
-          <a:solidFill>
-            <a:srgbClr val="1F6F4A"/>
-          </a:solidFill>
-          <a:ln>
-            <a:noFill/>
-          </a:ln>
-          <a:effectLst/>
-        </p:spPr>
-        <p:style>
-          <a:lnRef idx="1">
-            <a:schemeClr val="accent1"/>
-          </a:lnRef>
-          <a:fillRef idx="3">
-            <a:schemeClr val="accent1"/>
-          </a:fillRef>
-          <a:effectRef idx="2">
-            <a:schemeClr val="accent1"/>
-          </a:effectRef>
-          <a:fontRef idx="minor">
-            <a:schemeClr val="lt1"/>
-          </a:fontRef>
-        </p:style>
-        <p:txBody>
-          <a:bodyPr rtlCol="0" anchor="ctr" wrap="square"/>
-          <a:lstStyle/>
-          <a:p>
-            <a:pPr algn="ctr">
-              <a:spcAft>
-                <a:spcPts val="0"/>
-              </a:spcAft>
-            </a:pPr>
-            <a:r>
-              <a:rPr sz="1800" b="1">
-                <a:solidFill>
-                  <a:srgbClr val="FFFFFF"/>
-                </a:solidFill>
-                <a:latin typeface="Calibri"/>
-              </a:rPr>
-              <a:t>5</a:t>
-            </a:r>
-          </a:p>
-        </p:txBody>
-      </p:sp>
-      <p:sp>
-        <p:nvSpPr>
-          <p:cNvPr id="21" name="TextBox 20"/>
-          <p:cNvSpPr txBox="1"/>
-          <p:nvPr/>
-        </p:nvSpPr>
-        <p:spPr>
-          <a:xfrm>
-            <a:off x="1417320" y="4690872"/>
-            <a:ext cx="1828800" cy="457200"/>
-          </a:xfrm>
-          <a:prstGeom prst="rect">
-            <a:avLst/>
-          </a:prstGeom>
-          <a:noFill/>
-        </p:spPr>
-        <p:txBody>
-          <a:bodyPr wrap="square" lIns="45720" rIns="45720">
-            <a:spAutoFit/>
-          </a:bodyPr>
-          <a:lstStyle/>
-          <a:p>
-            <a:pPr algn="l">
-              <a:spcAft>
-                <a:spcPts val="600"/>
-              </a:spcAft>
-            </a:pPr>
-            <a:r>
-              <a:rPr sz="1700" b="1">
-                <a:solidFill>
-                  <a:srgbClr val="1F6F4A"/>
-                </a:solidFill>
-                <a:latin typeface="Calibri"/>
-              </a:rPr>
-              <a:t>Minorista</a:t>
-            </a:r>
-          </a:p>
-        </p:txBody>
-      </p:sp>
-      <p:sp>
-        <p:nvSpPr>
-          <p:cNvPr id="22" name="TextBox 21"/>
-          <p:cNvSpPr txBox="1"/>
-          <p:nvPr/>
-        </p:nvSpPr>
-        <p:spPr>
-          <a:xfrm>
-            <a:off x="3200400" y="4690872"/>
-            <a:ext cx="8503920" cy="457200"/>
-          </a:xfrm>
-          <a:prstGeom prst="rect">
-            <a:avLst/>
-          </a:prstGeom>
-          <a:noFill/>
-        </p:spPr>
-        <p:txBody>
-          <a:bodyPr wrap="square" lIns="45720" rIns="45720">
-            <a:spAutoFit/>
-          </a:bodyPr>
-          <a:lstStyle/>
-          <a:p>
-            <a:pPr algn="l">
-              <a:spcAft>
-                <a:spcPts val="600"/>
-              </a:spcAft>
-            </a:pPr>
-            <a:r>
-              <a:rPr sz="1700" b="0">
-                <a:solidFill>
-                  <a:srgbClr val="1D2420"/>
-                </a:solidFill>
-                <a:latin typeface="Calibri"/>
-              </a:rPr>
-              <a:t>Lo recibe → la existencia sube sola</a:t>
-            </a:r>
-          </a:p>
-        </p:txBody>
-      </p:sp>
-      <p:sp>
-        <p:nvSpPr>
-          <p:cNvPr id="23" name="Oval 22"/>
-          <p:cNvSpPr/>
-          <p:nvPr/>
-        </p:nvSpPr>
-        <p:spPr>
-          <a:xfrm>
-            <a:off x="640080" y="5349240"/>
-            <a:ext cx="548640" cy="548640"/>
-          </a:xfrm>
-          <a:prstGeom prst="ellipse">
-            <a:avLst/>
-          </a:prstGeom>
-          <a:solidFill>
-            <a:srgbClr val="1F6F4A"/>
-          </a:solidFill>
-          <a:ln>
-            <a:noFill/>
-          </a:ln>
-          <a:effectLst/>
-        </p:spPr>
-        <p:style>
-          <a:lnRef idx="1">
-            <a:schemeClr val="accent1"/>
-          </a:lnRef>
-          <a:fillRef idx="3">
-            <a:schemeClr val="accent1"/>
-          </a:fillRef>
-          <a:effectRef idx="2">
-            <a:schemeClr val="accent1"/>
-          </a:effectRef>
-          <a:fontRef idx="minor">
-            <a:schemeClr val="lt1"/>
-          </a:fontRef>
-        </p:style>
-        <p:txBody>
-          <a:bodyPr rtlCol="0" anchor="ctr" wrap="square"/>
-          <a:lstStyle/>
-          <a:p>
-            <a:pPr algn="ctr">
-              <a:spcAft>
-                <a:spcPts val="0"/>
-              </a:spcAft>
-            </a:pPr>
-            <a:r>
-              <a:rPr sz="1800" b="1">
-                <a:solidFill>
-                  <a:srgbClr val="FFFFFF"/>
-                </a:solidFill>
-                <a:latin typeface="Calibri"/>
-              </a:rPr>
-              <a:t>6</a:t>
-            </a:r>
-          </a:p>
-        </p:txBody>
-      </p:sp>
-      <p:sp>
-        <p:nvSpPr>
-          <p:cNvPr id="24" name="TextBox 23"/>
-          <p:cNvSpPr txBox="1"/>
-          <p:nvPr/>
-        </p:nvSpPr>
-        <p:spPr>
-          <a:xfrm>
-            <a:off x="1417320" y="5422392"/>
-            <a:ext cx="1828800" cy="457200"/>
-          </a:xfrm>
-          <a:prstGeom prst="rect">
-            <a:avLst/>
-          </a:prstGeom>
-          <a:noFill/>
-        </p:spPr>
-        <p:txBody>
-          <a:bodyPr wrap="square" lIns="45720" rIns="45720">
-            <a:spAutoFit/>
-          </a:bodyPr>
-          <a:lstStyle/>
-          <a:p>
-            <a:pPr algn="l">
-              <a:spcAft>
-                <a:spcPts val="600"/>
-              </a:spcAft>
-            </a:pPr>
-            <a:r>
-              <a:rPr sz="1700" b="1">
-                <a:solidFill>
-                  <a:srgbClr val="1F6F4A"/>
-                </a:solidFill>
-                <a:latin typeface="Calibri"/>
-              </a:rPr>
-              <a:t>Admin</a:t>
-            </a:r>
-          </a:p>
-        </p:txBody>
-      </p:sp>
-      <p:sp>
-        <p:nvSpPr>
-          <p:cNvPr id="25" name="TextBox 24"/>
-          <p:cNvSpPr txBox="1"/>
-          <p:nvPr/>
-        </p:nvSpPr>
-        <p:spPr>
-          <a:xfrm>
-            <a:off x="3200400" y="5422392"/>
-            <a:ext cx="8503920" cy="457200"/>
-          </a:xfrm>
-          <a:prstGeom prst="rect">
-            <a:avLst/>
-          </a:prstGeom>
-          <a:noFill/>
-        </p:spPr>
-        <p:txBody>
-          <a:bodyPr wrap="square" lIns="45720" rIns="45720">
-            <a:spAutoFit/>
-          </a:bodyPr>
-          <a:lstStyle/>
-          <a:p>
-            <a:pPr algn="l">
-              <a:spcAft>
-                <a:spcPts val="600"/>
-              </a:spcAft>
-            </a:pPr>
-            <a:r>
-              <a:rPr sz="1700" b="0">
-                <a:solidFill>
-                  <a:srgbClr val="1D2420"/>
-                </a:solidFill>
-                <a:latin typeface="Calibri"/>
-              </a:rPr>
-              <a:t>Ve la actividad en «Estado de los servicios»</a:t>
-            </a:r>
-          </a:p>
-        </p:txBody>
-      </p:sp>
-    </p:spTree>
-  </p:cSld>
-  <p:clrMapOvr>
-    <a:masterClrMapping/>
-  </p:clrMapOvr>
-</p:sld>
-</file>
-
-<file path=ppt/slides/slide16.xml><?xml version="1.0" encoding="utf-8"?>
-<p:sld xmlns:a="http://schemas.openxmlformats.org/drawingml/2006/main" xmlns:p="http://schemas.openxmlformats.org/presentationml/2006/main" xmlns:r="http://schemas.openxmlformats.org/officeDocument/2006/relationships">
-  <p:cSld>
-    <p:spTree>
-      <p:nvGrpSpPr>
-        <p:cNvPr id="1" name=""/>
-        <p:cNvGrpSpPr/>
-        <p:nvPr/>
-      </p:nvGrpSpPr>
-      <p:grpSpPr/>
-      <p:sp>
-        <p:nvSpPr>
-          <p:cNvPr id="2" name="Rectangle 1"/>
-          <p:cNvSpPr/>
-          <p:nvPr/>
-        </p:nvSpPr>
-        <p:spPr>
-          <a:xfrm>
-            <a:off x="0" y="0"/>
-            <a:ext cx="12191695" cy="6858000"/>
-          </a:xfrm>
-          <a:prstGeom prst="rect">
-            <a:avLst/>
-          </a:prstGeom>
-          <a:solidFill>
-            <a:srgbClr val="1F6F4A"/>
-          </a:solidFill>
-          <a:ln>
-            <a:noFill/>
-          </a:ln>
-          <a:effectLst/>
-        </p:spPr>
-        <p:style>
-          <a:lnRef idx="1">
-            <a:schemeClr val="accent1"/>
-          </a:lnRef>
-          <a:fillRef idx="3">
-            <a:schemeClr val="accent1"/>
-          </a:fillRef>
-          <a:effectRef idx="2">
-            <a:schemeClr val="accent1"/>
-          </a:effectRef>
-          <a:fontRef idx="minor">
-            <a:schemeClr val="lt1"/>
-          </a:fontRef>
-        </p:style>
-        <p:txBody>
-          <a:bodyPr rtlCol="0" anchor="ctr"/>
-          <a:lstStyle/>
-          <a:p>
-            <a:pPr algn="ctr"/>
+            <a:endParaRPr/>
           </a:p>
         </p:txBody>
       </p:sp>
@@ -10307,7 +9086,7 @@
 </file>
 
 <file path=ppt/slides/slide2.xml><?xml version="1.0" encoding="utf-8"?>
-<p:sld xmlns:a="http://schemas.openxmlformats.org/drawingml/2006/main" xmlns:p="http://schemas.openxmlformats.org/presentationml/2006/main" xmlns:r="http://schemas.openxmlformats.org/officeDocument/2006/relationships">
+<p:sld xmlns:a="http://schemas.openxmlformats.org/drawingml/2006/main" xmlns:r="http://schemas.openxmlformats.org/officeDocument/2006/relationships" xmlns:p="http://schemas.openxmlformats.org/presentationml/2006/main">
   <p:cSld>
     <p:spTree>
       <p:nvGrpSpPr>
@@ -10315,7 +9094,14 @@
         <p:cNvGrpSpPr/>
         <p:nvPr/>
       </p:nvGrpSpPr>
-      <p:grpSpPr/>
+      <p:grpSpPr>
+        <a:xfrm>
+          <a:off x="0" y="0"/>
+          <a:ext cx="0" cy="0"/>
+          <a:chOff x="0" y="0"/>
+          <a:chExt cx="0" cy="0"/>
+        </a:xfrm>
+      </p:grpSpPr>
       <p:sp>
         <p:nvSpPr>
           <p:cNvPr id="2" name="Rectangle 1"/>
@@ -10357,6 +9143,7 @@
           <a:lstStyle/>
           <a:p>
             <a:pPr algn="ctr"/>
+            <a:endParaRPr/>
           </a:p>
         </p:txBody>
       </p:sp>
@@ -10475,7 +9262,7 @@
           </a:fontRef>
         </p:style>
         <p:txBody>
-          <a:bodyPr rtlCol="0" anchor="ctr" wrap="square"/>
+          <a:bodyPr wrap="square" rtlCol="0" anchor="ctr"/>
           <a:lstStyle/>
           <a:p>
             <a:pPr algn="ctr">
@@ -10614,6 +9401,7 @@
           <a:lstStyle/>
           <a:p>
             <a:pPr algn="ctr"/>
+            <a:endParaRPr/>
           </a:p>
         </p:txBody>
       </p:sp>
@@ -10736,6 +9524,7 @@
           <a:lstStyle/>
           <a:p>
             <a:pPr algn="ctr"/>
+            <a:endParaRPr/>
           </a:p>
         </p:txBody>
       </p:sp>
@@ -10858,6 +9647,7 @@
           <a:lstStyle/>
           <a:p>
             <a:pPr algn="ctr"/>
+            <a:endParaRPr/>
           </a:p>
         </p:txBody>
       </p:sp>
@@ -10980,6 +9770,7 @@
           <a:lstStyle/>
           <a:p>
             <a:pPr algn="ctr"/>
+            <a:endParaRPr/>
           </a:p>
         </p:txBody>
       </p:sp>
@@ -11326,7 +10117,7 @@
 </file>
 
 <file path=ppt/slides/slide3.xml><?xml version="1.0" encoding="utf-8"?>
-<p:sld xmlns:a="http://schemas.openxmlformats.org/drawingml/2006/main" xmlns:p="http://schemas.openxmlformats.org/presentationml/2006/main" xmlns:r="http://schemas.openxmlformats.org/officeDocument/2006/relationships">
+<p:sld xmlns:a="http://schemas.openxmlformats.org/drawingml/2006/main" xmlns:r="http://schemas.openxmlformats.org/officeDocument/2006/relationships" xmlns:p="http://schemas.openxmlformats.org/presentationml/2006/main">
   <p:cSld>
     <p:spTree>
       <p:nvGrpSpPr>
@@ -11334,7 +10125,14 @@
         <p:cNvGrpSpPr/>
         <p:nvPr/>
       </p:nvGrpSpPr>
-      <p:grpSpPr/>
+      <p:grpSpPr>
+        <a:xfrm>
+          <a:off x="0" y="0"/>
+          <a:ext cx="0" cy="0"/>
+          <a:chOff x="0" y="0"/>
+          <a:chExt cx="0" cy="0"/>
+        </a:xfrm>
+      </p:grpSpPr>
       <p:sp>
         <p:nvSpPr>
           <p:cNvPr id="2" name="Rectangle 1"/>
@@ -11376,6 +10174,7 @@
           <a:lstStyle/>
           <a:p>
             <a:pPr algn="ctr"/>
+            <a:endParaRPr/>
           </a:p>
         </p:txBody>
       </p:sp>
@@ -11455,7 +10254,7 @@
           </a:fontRef>
         </p:style>
         <p:txBody>
-          <a:bodyPr rtlCol="0" anchor="ctr" wrap="square"/>
+          <a:bodyPr wrap="square" rtlCol="0" anchor="ctr"/>
           <a:lstStyle/>
           <a:p>
             <a:pPr algn="ctr">
@@ -11586,7 +10385,7 @@
 </file>
 
 <file path=ppt/slides/slide4.xml><?xml version="1.0" encoding="utf-8"?>
-<p:sld xmlns:a="http://schemas.openxmlformats.org/drawingml/2006/main" xmlns:p="http://schemas.openxmlformats.org/presentationml/2006/main" xmlns:r="http://schemas.openxmlformats.org/officeDocument/2006/relationships">
+<p:sld xmlns:a="http://schemas.openxmlformats.org/drawingml/2006/main" xmlns:r="http://schemas.openxmlformats.org/officeDocument/2006/relationships" xmlns:p="http://schemas.openxmlformats.org/presentationml/2006/main">
   <p:cSld>
     <p:spTree>
       <p:nvGrpSpPr>
@@ -11594,7 +10393,14 @@
         <p:cNvGrpSpPr/>
         <p:nvPr/>
       </p:nvGrpSpPr>
-      <p:grpSpPr/>
+      <p:grpSpPr>
+        <a:xfrm>
+          <a:off x="0" y="0"/>
+          <a:ext cx="0" cy="0"/>
+          <a:chOff x="0" y="0"/>
+          <a:chExt cx="0" cy="0"/>
+        </a:xfrm>
+      </p:grpSpPr>
       <p:sp>
         <p:nvSpPr>
           <p:cNvPr id="2" name="Rectangle 1"/>
@@ -11636,6 +10442,7 @@
           <a:lstStyle/>
           <a:p>
             <a:pPr algn="ctr"/>
+            <a:endParaRPr/>
           </a:p>
         </p:txBody>
       </p:sp>
@@ -11715,7 +10522,7 @@
           </a:fontRef>
         </p:style>
         <p:txBody>
-          <a:bodyPr rtlCol="0" anchor="ctr" wrap="square"/>
+          <a:bodyPr wrap="square" rtlCol="0" anchor="ctr"/>
           <a:lstStyle/>
           <a:p>
             <a:pPr algn="ctr">
@@ -11832,14 +10639,32 @@
                 <a:tableStyleId>{5C22544A-7EE6-4342-B048-85BDC9FD1C3A}</a:tableStyleId>
               </a:tblPr>
               <a:tblGrid>
-                <a:gridCol w="2194560"/>
-                <a:gridCol w="914399"/>
-                <a:gridCol w="8046720"/>
+                <a:gridCol w="2194560">
+                  <a:extLst>
+                    <a:ext uri="{9D8B030D-6E8A-4147-A177-3AD203B41FA5}">
+                      <a16:colId xmlns:a16="http://schemas.microsoft.com/office/drawing/2014/main" val="20000"/>
+                    </a:ext>
+                  </a:extLst>
+                </a:gridCol>
+                <a:gridCol w="914399">
+                  <a:extLst>
+                    <a:ext uri="{9D8B030D-6E8A-4147-A177-3AD203B41FA5}">
+                      <a16:colId xmlns:a16="http://schemas.microsoft.com/office/drawing/2014/main" val="20001"/>
+                    </a:ext>
+                  </a:extLst>
+                </a:gridCol>
+                <a:gridCol w="8046720">
+                  <a:extLst>
+                    <a:ext uri="{9D8B030D-6E8A-4147-A177-3AD203B41FA5}">
+                      <a16:colId xmlns:a16="http://schemas.microsoft.com/office/drawing/2014/main" val="20002"/>
+                    </a:ext>
+                  </a:extLst>
+                </a:gridCol>
               </a:tblGrid>
               <a:tr h="457200">
                 <a:tc>
                   <a:txBody>
-                    <a:bodyPr wrap="square"/>
+                    <a:bodyPr/>
                     <a:lstStyle/>
                     <a:p>
                       <a:pPr algn="l">
@@ -11866,7 +10691,7 @@
                 </a:tc>
                 <a:tc>
                   <a:txBody>
-                    <a:bodyPr wrap="square"/>
+                    <a:bodyPr/>
                     <a:lstStyle/>
                     <a:p>
                       <a:pPr algn="l">
@@ -11893,7 +10718,7 @@
                 </a:tc>
                 <a:tc>
                   <a:txBody>
-                    <a:bodyPr wrap="square"/>
+                    <a:bodyPr/>
                     <a:lstStyle/>
                     <a:p>
                       <a:pPr algn="l">
@@ -11918,11 +10743,16 @@
                     </a:solidFill>
                   </a:tcPr>
                 </a:tc>
+                <a:extLst>
+                  <a:ext uri="{0D108BD9-81ED-4DB2-BD59-A6C34878D82A}">
+                    <a16:rowId xmlns:a16="http://schemas.microsoft.com/office/drawing/2014/main" val="10000"/>
+                  </a:ext>
+                </a:extLst>
               </a:tr>
               <a:tr h="457200">
                 <a:tc>
                   <a:txBody>
-                    <a:bodyPr wrap="square"/>
+                    <a:bodyPr/>
                     <a:lstStyle/>
                     <a:p>
                       <a:pPr algn="l">
@@ -11949,7 +10779,7 @@
                 </a:tc>
                 <a:tc>
                   <a:txBody>
-                    <a:bodyPr wrap="square"/>
+                    <a:bodyPr/>
                     <a:lstStyle/>
                     <a:p>
                       <a:pPr algn="l">
@@ -11976,7 +10806,7 @@
                 </a:tc>
                 <a:tc>
                   <a:txBody>
-                    <a:bodyPr wrap="square"/>
+                    <a:bodyPr/>
                     <a:lstStyle/>
                     <a:p>
                       <a:pPr algn="l">
@@ -12001,11 +10831,16 @@
                     </a:solidFill>
                   </a:tcPr>
                 </a:tc>
+                <a:extLst>
+                  <a:ext uri="{0D108BD9-81ED-4DB2-BD59-A6C34878D82A}">
+                    <a16:rowId xmlns:a16="http://schemas.microsoft.com/office/drawing/2014/main" val="10001"/>
+                  </a:ext>
+                </a:extLst>
               </a:tr>
               <a:tr h="457200">
                 <a:tc>
                   <a:txBody>
-                    <a:bodyPr wrap="square"/>
+                    <a:bodyPr/>
                     <a:lstStyle/>
                     <a:p>
                       <a:pPr algn="l">
@@ -12032,7 +10867,7 @@
                 </a:tc>
                 <a:tc>
                   <a:txBody>
-                    <a:bodyPr wrap="square"/>
+                    <a:bodyPr/>
                     <a:lstStyle/>
                     <a:p>
                       <a:pPr algn="l">
@@ -12059,7 +10894,7 @@
                 </a:tc>
                 <a:tc>
                   <a:txBody>
-                    <a:bodyPr wrap="square"/>
+                    <a:bodyPr/>
                     <a:lstStyle/>
                     <a:p>
                       <a:pPr algn="l">
@@ -12084,11 +10919,16 @@
                     </a:solidFill>
                   </a:tcPr>
                 </a:tc>
+                <a:extLst>
+                  <a:ext uri="{0D108BD9-81ED-4DB2-BD59-A6C34878D82A}">
+                    <a16:rowId xmlns:a16="http://schemas.microsoft.com/office/drawing/2014/main" val="10002"/>
+                  </a:ext>
+                </a:extLst>
               </a:tr>
               <a:tr h="457200">
                 <a:tc>
                   <a:txBody>
-                    <a:bodyPr wrap="square"/>
+                    <a:bodyPr/>
                     <a:lstStyle/>
                     <a:p>
                       <a:pPr algn="l">
@@ -12115,7 +10955,7 @@
                 </a:tc>
                 <a:tc>
                   <a:txBody>
-                    <a:bodyPr wrap="square"/>
+                    <a:bodyPr/>
                     <a:lstStyle/>
                     <a:p>
                       <a:pPr algn="l">
@@ -12142,7 +10982,7 @@
                 </a:tc>
                 <a:tc>
                   <a:txBody>
-                    <a:bodyPr wrap="square"/>
+                    <a:bodyPr/>
                     <a:lstStyle/>
                     <a:p>
                       <a:pPr algn="l">
@@ -12167,11 +11007,16 @@
                     </a:solidFill>
                   </a:tcPr>
                 </a:tc>
+                <a:extLst>
+                  <a:ext uri="{0D108BD9-81ED-4DB2-BD59-A6C34878D82A}">
+                    <a16:rowId xmlns:a16="http://schemas.microsoft.com/office/drawing/2014/main" val="10003"/>
+                  </a:ext>
+                </a:extLst>
               </a:tr>
               <a:tr h="457200">
                 <a:tc>
                   <a:txBody>
-                    <a:bodyPr wrap="square"/>
+                    <a:bodyPr/>
                     <a:lstStyle/>
                     <a:p>
                       <a:pPr algn="l">
@@ -12198,7 +11043,7 @@
                 </a:tc>
                 <a:tc>
                   <a:txBody>
-                    <a:bodyPr wrap="square"/>
+                    <a:bodyPr/>
                     <a:lstStyle/>
                     <a:p>
                       <a:pPr algn="l">
@@ -12225,7 +11070,7 @@
                 </a:tc>
                 <a:tc>
                   <a:txBody>
-                    <a:bodyPr wrap="square"/>
+                    <a:bodyPr/>
                     <a:lstStyle/>
                     <a:p>
                       <a:pPr algn="l">
@@ -12250,11 +11095,16 @@
                     </a:solidFill>
                   </a:tcPr>
                 </a:tc>
+                <a:extLst>
+                  <a:ext uri="{0D108BD9-81ED-4DB2-BD59-A6C34878D82A}">
+                    <a16:rowId xmlns:a16="http://schemas.microsoft.com/office/drawing/2014/main" val="10004"/>
+                  </a:ext>
+                </a:extLst>
               </a:tr>
               <a:tr h="457200">
                 <a:tc>
                   <a:txBody>
-                    <a:bodyPr wrap="square"/>
+                    <a:bodyPr/>
                     <a:lstStyle/>
                     <a:p>
                       <a:pPr algn="l">
@@ -12281,7 +11131,7 @@
                 </a:tc>
                 <a:tc>
                   <a:txBody>
-                    <a:bodyPr wrap="square"/>
+                    <a:bodyPr/>
                     <a:lstStyle/>
                     <a:p>
                       <a:pPr algn="l">
@@ -12308,7 +11158,7 @@
                 </a:tc>
                 <a:tc>
                   <a:txBody>
-                    <a:bodyPr wrap="square"/>
+                    <a:bodyPr/>
                     <a:lstStyle/>
                     <a:p>
                       <a:pPr algn="l">
@@ -12333,11 +11183,16 @@
                     </a:solidFill>
                   </a:tcPr>
                 </a:tc>
+                <a:extLst>
+                  <a:ext uri="{0D108BD9-81ED-4DB2-BD59-A6C34878D82A}">
+                    <a16:rowId xmlns:a16="http://schemas.microsoft.com/office/drawing/2014/main" val="10005"/>
+                  </a:ext>
+                </a:extLst>
               </a:tr>
               <a:tr h="457200">
                 <a:tc>
                   <a:txBody>
-                    <a:bodyPr wrap="square"/>
+                    <a:bodyPr/>
                     <a:lstStyle/>
                     <a:p>
                       <a:pPr algn="l">
@@ -12364,7 +11219,7 @@
                 </a:tc>
                 <a:tc>
                   <a:txBody>
-                    <a:bodyPr wrap="square"/>
+                    <a:bodyPr/>
                     <a:lstStyle/>
                     <a:p>
                       <a:pPr algn="l">
@@ -12391,7 +11246,7 @@
                 </a:tc>
                 <a:tc>
                   <a:txBody>
-                    <a:bodyPr wrap="square"/>
+                    <a:bodyPr/>
                     <a:lstStyle/>
                     <a:p>
                       <a:pPr algn="l">
@@ -12416,11 +11271,16 @@
                     </a:solidFill>
                   </a:tcPr>
                 </a:tc>
+                <a:extLst>
+                  <a:ext uri="{0D108BD9-81ED-4DB2-BD59-A6C34878D82A}">
+                    <a16:rowId xmlns:a16="http://schemas.microsoft.com/office/drawing/2014/main" val="10006"/>
+                  </a:ext>
+                </a:extLst>
               </a:tr>
               <a:tr h="457200">
                 <a:tc>
                   <a:txBody>
-                    <a:bodyPr wrap="square"/>
+                    <a:bodyPr/>
                     <a:lstStyle/>
                     <a:p>
                       <a:pPr algn="l">
@@ -12447,7 +11307,7 @@
                 </a:tc>
                 <a:tc>
                   <a:txBody>
-                    <a:bodyPr wrap="square"/>
+                    <a:bodyPr/>
                     <a:lstStyle/>
                     <a:p>
                       <a:pPr algn="l">
@@ -12474,7 +11334,7 @@
                 </a:tc>
                 <a:tc>
                   <a:txBody>
-                    <a:bodyPr wrap="square"/>
+                    <a:bodyPr/>
                     <a:lstStyle/>
                     <a:p>
                       <a:pPr algn="l">
@@ -12499,11 +11359,16 @@
                     </a:solidFill>
                   </a:tcPr>
                 </a:tc>
+                <a:extLst>
+                  <a:ext uri="{0D108BD9-81ED-4DB2-BD59-A6C34878D82A}">
+                    <a16:rowId xmlns:a16="http://schemas.microsoft.com/office/drawing/2014/main" val="10007"/>
+                  </a:ext>
+                </a:extLst>
               </a:tr>
               <a:tr h="457200">
                 <a:tc>
                   <a:txBody>
-                    <a:bodyPr wrap="square"/>
+                    <a:bodyPr/>
                     <a:lstStyle/>
                     <a:p>
                       <a:pPr algn="l">
@@ -12530,7 +11395,7 @@
                 </a:tc>
                 <a:tc>
                   <a:txBody>
-                    <a:bodyPr wrap="square"/>
+                    <a:bodyPr/>
                     <a:lstStyle/>
                     <a:p>
                       <a:pPr algn="l">
@@ -12557,7 +11422,7 @@
                 </a:tc>
                 <a:tc>
                   <a:txBody>
-                    <a:bodyPr wrap="square"/>
+                    <a:bodyPr/>
                     <a:lstStyle/>
                     <a:p>
                       <a:pPr algn="l">
@@ -12582,6 +11447,11 @@
                     </a:solidFill>
                   </a:tcPr>
                 </a:tc>
+                <a:extLst>
+                  <a:ext uri="{0D108BD9-81ED-4DB2-BD59-A6C34878D82A}">
+                    <a16:rowId xmlns:a16="http://schemas.microsoft.com/office/drawing/2014/main" val="10008"/>
+                  </a:ext>
+                </a:extLst>
               </a:tr>
             </a:tbl>
           </a:graphicData>
@@ -12671,7 +11541,7 @@
 </file>
 
 <file path=ppt/slides/slide5.xml><?xml version="1.0" encoding="utf-8"?>
-<p:sld xmlns:a="http://schemas.openxmlformats.org/drawingml/2006/main" xmlns:p="http://schemas.openxmlformats.org/presentationml/2006/main" xmlns:r="http://schemas.openxmlformats.org/officeDocument/2006/relationships">
+<p:sld xmlns:a="http://schemas.openxmlformats.org/drawingml/2006/main" xmlns:r="http://schemas.openxmlformats.org/officeDocument/2006/relationships" xmlns:p="http://schemas.openxmlformats.org/presentationml/2006/main">
   <p:cSld>
     <p:spTree>
       <p:nvGrpSpPr>
@@ -12679,7 +11549,14 @@
         <p:cNvGrpSpPr/>
         <p:nvPr/>
       </p:nvGrpSpPr>
-      <p:grpSpPr/>
+      <p:grpSpPr>
+        <a:xfrm>
+          <a:off x="0" y="0"/>
+          <a:ext cx="0" cy="0"/>
+          <a:chOff x="0" y="0"/>
+          <a:chExt cx="0" cy="0"/>
+        </a:xfrm>
+      </p:grpSpPr>
       <p:sp>
         <p:nvSpPr>
           <p:cNvPr id="2" name="Rectangle 1"/>
@@ -12721,6 +11598,7 @@
           <a:lstStyle/>
           <a:p>
             <a:pPr algn="ctr"/>
+            <a:endParaRPr/>
           </a:p>
         </p:txBody>
       </p:sp>
@@ -12839,7 +11717,7 @@
           </a:fontRef>
         </p:style>
         <p:txBody>
-          <a:bodyPr rtlCol="0" anchor="ctr" wrap="square"/>
+          <a:bodyPr wrap="square" rtlCol="0" anchor="ctr"/>
           <a:lstStyle/>
           <a:p>
             <a:pPr algn="ctr">
@@ -12978,6 +11856,7 @@
           <a:lstStyle/>
           <a:p>
             <a:pPr algn="ctr"/>
+            <a:endParaRPr/>
           </a:p>
         </p:txBody>
       </p:sp>
@@ -13022,6 +11901,7 @@
           <a:lstStyle/>
           <a:p>
             <a:pPr algn="ctr"/>
+            <a:endParaRPr/>
           </a:p>
         </p:txBody>
       </p:sp>
@@ -13377,7 +12257,7 @@
 </file>
 
 <file path=ppt/slides/slide6.xml><?xml version="1.0" encoding="utf-8"?>
-<p:sld xmlns:a="http://schemas.openxmlformats.org/drawingml/2006/main" xmlns:p="http://schemas.openxmlformats.org/presentationml/2006/main" xmlns:r="http://schemas.openxmlformats.org/officeDocument/2006/relationships">
+<p:sld xmlns:a="http://schemas.openxmlformats.org/drawingml/2006/main" xmlns:r="http://schemas.openxmlformats.org/officeDocument/2006/relationships" xmlns:p="http://schemas.openxmlformats.org/presentationml/2006/main">
   <p:cSld>
     <p:spTree>
       <p:nvGrpSpPr>
@@ -13385,7 +12265,14 @@
         <p:cNvGrpSpPr/>
         <p:nvPr/>
       </p:nvGrpSpPr>
-      <p:grpSpPr/>
+      <p:grpSpPr>
+        <a:xfrm>
+          <a:off x="0" y="0"/>
+          <a:ext cx="0" cy="0"/>
+          <a:chOff x="0" y="0"/>
+          <a:chExt cx="0" cy="0"/>
+        </a:xfrm>
+      </p:grpSpPr>
       <p:sp>
         <p:nvSpPr>
           <p:cNvPr id="2" name="Rectangle 1"/>
@@ -13427,6 +12314,7 @@
           <a:lstStyle/>
           <a:p>
             <a:pPr algn="ctr"/>
+            <a:endParaRPr/>
           </a:p>
         </p:txBody>
       </p:sp>
@@ -13545,7 +12433,7 @@
           </a:fontRef>
         </p:style>
         <p:txBody>
-          <a:bodyPr rtlCol="0" anchor="ctr" wrap="square"/>
+          <a:bodyPr wrap="square" rtlCol="0" anchor="ctr"/>
           <a:lstStyle/>
           <a:p>
             <a:pPr algn="ctr">
@@ -13684,6 +12572,7 @@
           <a:lstStyle/>
           <a:p>
             <a:pPr algn="ctr"/>
+            <a:endParaRPr/>
           </a:p>
         </p:txBody>
       </p:sp>
@@ -13728,6 +12617,7 @@
           <a:lstStyle/>
           <a:p>
             <a:pPr algn="ctr"/>
+            <a:endParaRPr/>
           </a:p>
         </p:txBody>
       </p:sp>
@@ -13850,6 +12740,7 @@
           <a:lstStyle/>
           <a:p>
             <a:pPr algn="ctr"/>
+            <a:endParaRPr/>
           </a:p>
         </p:txBody>
       </p:sp>
@@ -13894,6 +12785,7 @@
           <a:lstStyle/>
           <a:p>
             <a:pPr algn="ctr"/>
+            <a:endParaRPr/>
           </a:p>
         </p:txBody>
       </p:sp>
@@ -14016,6 +12908,7 @@
           <a:lstStyle/>
           <a:p>
             <a:pPr algn="ctr"/>
+            <a:endParaRPr/>
           </a:p>
         </p:txBody>
       </p:sp>
@@ -14060,6 +12953,7 @@
           <a:lstStyle/>
           <a:p>
             <a:pPr algn="ctr"/>
+            <a:endParaRPr/>
           </a:p>
         </p:txBody>
       </p:sp>
@@ -14318,7 +13212,7 @@
 </file>
 
 <file path=ppt/slides/slide7.xml><?xml version="1.0" encoding="utf-8"?>
-<p:sld xmlns:a="http://schemas.openxmlformats.org/drawingml/2006/main" xmlns:p="http://schemas.openxmlformats.org/presentationml/2006/main" xmlns:r="http://schemas.openxmlformats.org/officeDocument/2006/relationships">
+<p:sld xmlns:a="http://schemas.openxmlformats.org/drawingml/2006/main" xmlns:r="http://schemas.openxmlformats.org/officeDocument/2006/relationships" xmlns:p="http://schemas.openxmlformats.org/presentationml/2006/main">
   <p:cSld>
     <p:spTree>
       <p:nvGrpSpPr>
@@ -14326,7 +13220,14 @@
         <p:cNvGrpSpPr/>
         <p:nvPr/>
       </p:nvGrpSpPr>
-      <p:grpSpPr/>
+      <p:grpSpPr>
+        <a:xfrm>
+          <a:off x="0" y="0"/>
+          <a:ext cx="0" cy="0"/>
+          <a:chOff x="0" y="0"/>
+          <a:chExt cx="0" cy="0"/>
+        </a:xfrm>
+      </p:grpSpPr>
       <p:sp>
         <p:nvSpPr>
           <p:cNvPr id="2" name="Rectangle 1"/>
@@ -14368,6 +13269,7 @@
           <a:lstStyle/>
           <a:p>
             <a:pPr algn="ctr"/>
+            <a:endParaRPr/>
           </a:p>
         </p:txBody>
       </p:sp>
@@ -14447,7 +13349,7 @@
           </a:fontRef>
         </p:style>
         <p:txBody>
-          <a:bodyPr rtlCol="0" anchor="ctr" wrap="square"/>
+          <a:bodyPr wrap="square" rtlCol="0" anchor="ctr"/>
           <a:lstStyle/>
           <a:p>
             <a:pPr algn="ctr">
@@ -14564,13 +13466,25 @@
                 <a:tableStyleId>{5C22544A-7EE6-4342-B048-85BDC9FD1C3A}</a:tableStyleId>
               </a:tblPr>
               <a:tblGrid>
-                <a:gridCol w="4023360"/>
-                <a:gridCol w="1828800"/>
+                <a:gridCol w="4023360">
+                  <a:extLst>
+                    <a:ext uri="{9D8B030D-6E8A-4147-A177-3AD203B41FA5}">
+                      <a16:colId xmlns:a16="http://schemas.microsoft.com/office/drawing/2014/main" val="20000"/>
+                    </a:ext>
+                  </a:extLst>
+                </a:gridCol>
+                <a:gridCol w="1828800">
+                  <a:extLst>
+                    <a:ext uri="{9D8B030D-6E8A-4147-A177-3AD203B41FA5}">
+                      <a16:colId xmlns:a16="http://schemas.microsoft.com/office/drawing/2014/main" val="20001"/>
+                    </a:ext>
+                  </a:extLst>
+                </a:gridCol>
               </a:tblGrid>
               <a:tr h="457200">
                 <a:tc>
                   <a:txBody>
-                    <a:bodyPr wrap="square"/>
+                    <a:bodyPr/>
                     <a:lstStyle/>
                     <a:p>
                       <a:pPr algn="l">
@@ -14597,7 +13511,7 @@
                 </a:tc>
                 <a:tc>
                   <a:txBody>
-                    <a:bodyPr wrap="square"/>
+                    <a:bodyPr/>
                     <a:lstStyle/>
                     <a:p>
                       <a:pPr algn="l">
@@ -14622,11 +13536,16 @@
                     </a:solidFill>
                   </a:tcPr>
                 </a:tc>
+                <a:extLst>
+                  <a:ext uri="{0D108BD9-81ED-4DB2-BD59-A6C34878D82A}">
+                    <a16:rowId xmlns:a16="http://schemas.microsoft.com/office/drawing/2014/main" val="10000"/>
+                  </a:ext>
+                </a:extLst>
               </a:tr>
               <a:tr h="457200">
                 <a:tc>
                   <a:txBody>
-                    <a:bodyPr wrap="square"/>
+                    <a:bodyPr/>
                     <a:lstStyle/>
                     <a:p>
                       <a:pPr algn="l">
@@ -14653,7 +13572,7 @@
                 </a:tc>
                 <a:tc>
                   <a:txBody>
-                    <a:bodyPr wrap="square"/>
+                    <a:bodyPr/>
                     <a:lstStyle/>
                     <a:p>
                       <a:pPr algn="l">
@@ -14678,11 +13597,16 @@
                     </a:solidFill>
                   </a:tcPr>
                 </a:tc>
+                <a:extLst>
+                  <a:ext uri="{0D108BD9-81ED-4DB2-BD59-A6C34878D82A}">
+                    <a16:rowId xmlns:a16="http://schemas.microsoft.com/office/drawing/2014/main" val="10001"/>
+                  </a:ext>
+                </a:extLst>
               </a:tr>
               <a:tr h="457200">
                 <a:tc>
                   <a:txBody>
-                    <a:bodyPr wrap="square"/>
+                    <a:bodyPr/>
                     <a:lstStyle/>
                     <a:p>
                       <a:pPr algn="l">
@@ -14709,7 +13633,7 @@
                 </a:tc>
                 <a:tc>
                   <a:txBody>
-                    <a:bodyPr wrap="square"/>
+                    <a:bodyPr/>
                     <a:lstStyle/>
                     <a:p>
                       <a:pPr algn="l">
@@ -14734,11 +13658,16 @@
                     </a:solidFill>
                   </a:tcPr>
                 </a:tc>
+                <a:extLst>
+                  <a:ext uri="{0D108BD9-81ED-4DB2-BD59-A6C34878D82A}">
+                    <a16:rowId xmlns:a16="http://schemas.microsoft.com/office/drawing/2014/main" val="10002"/>
+                  </a:ext>
+                </a:extLst>
               </a:tr>
               <a:tr h="457200">
                 <a:tc>
                   <a:txBody>
-                    <a:bodyPr wrap="square"/>
+                    <a:bodyPr/>
                     <a:lstStyle/>
                     <a:p>
                       <a:pPr algn="l">
@@ -14765,7 +13694,7 @@
                 </a:tc>
                 <a:tc>
                   <a:txBody>
-                    <a:bodyPr wrap="square"/>
+                    <a:bodyPr/>
                     <a:lstStyle/>
                     <a:p>
                       <a:pPr algn="l">
@@ -14790,11 +13719,16 @@
                     </a:solidFill>
                   </a:tcPr>
                 </a:tc>
+                <a:extLst>
+                  <a:ext uri="{0D108BD9-81ED-4DB2-BD59-A6C34878D82A}">
+                    <a16:rowId xmlns:a16="http://schemas.microsoft.com/office/drawing/2014/main" val="10003"/>
+                  </a:ext>
+                </a:extLst>
               </a:tr>
               <a:tr h="457200">
                 <a:tc>
                   <a:txBody>
-                    <a:bodyPr wrap="square"/>
+                    <a:bodyPr/>
                     <a:lstStyle/>
                     <a:p>
                       <a:pPr algn="l">
@@ -14821,7 +13755,7 @@
                 </a:tc>
                 <a:tc>
                   <a:txBody>
-                    <a:bodyPr wrap="square"/>
+                    <a:bodyPr/>
                     <a:lstStyle/>
                     <a:p>
                       <a:pPr algn="l">
@@ -14846,11 +13780,16 @@
                     </a:solidFill>
                   </a:tcPr>
                 </a:tc>
+                <a:extLst>
+                  <a:ext uri="{0D108BD9-81ED-4DB2-BD59-A6C34878D82A}">
+                    <a16:rowId xmlns:a16="http://schemas.microsoft.com/office/drawing/2014/main" val="10004"/>
+                  </a:ext>
+                </a:extLst>
               </a:tr>
               <a:tr h="457200">
                 <a:tc>
                   <a:txBody>
-                    <a:bodyPr wrap="square"/>
+                    <a:bodyPr/>
                     <a:lstStyle/>
                     <a:p>
                       <a:pPr algn="l">
@@ -14877,7 +13816,7 @@
                 </a:tc>
                 <a:tc>
                   <a:txBody>
-                    <a:bodyPr wrap="square"/>
+                    <a:bodyPr/>
                     <a:lstStyle/>
                     <a:p>
                       <a:pPr algn="l">
@@ -14902,6 +13841,11 @@
                     </a:solidFill>
                   </a:tcPr>
                 </a:tc>
+                <a:extLst>
+                  <a:ext uri="{0D108BD9-81ED-4DB2-BD59-A6C34878D82A}">
+                    <a16:rowId xmlns:a16="http://schemas.microsoft.com/office/drawing/2014/main" val="10005"/>
+                  </a:ext>
+                </a:extLst>
               </a:tr>
             </a:tbl>
           </a:graphicData>
@@ -14984,6 +13928,12 @@
                 <a:spcPts val="200"/>
               </a:spcAft>
             </a:pPr>
+            <a:endParaRPr sz="1600" b="0">
+              <a:solidFill>
+                <a:srgbClr val="E6F0EA"/>
+              </a:solidFill>
+              <a:latin typeface="Consolas"/>
+            </a:endParaRPr>
           </a:p>
           <a:p>
             <a:pPr algn="l">
@@ -15155,7 +14105,7 @@
 </file>
 
 <file path=ppt/slides/slide8.xml><?xml version="1.0" encoding="utf-8"?>
-<p:sld xmlns:a="http://schemas.openxmlformats.org/drawingml/2006/main" xmlns:p="http://schemas.openxmlformats.org/presentationml/2006/main" xmlns:r="http://schemas.openxmlformats.org/officeDocument/2006/relationships">
+<p:sld xmlns:a="http://schemas.openxmlformats.org/drawingml/2006/main" xmlns:r="http://schemas.openxmlformats.org/officeDocument/2006/relationships" xmlns:p="http://schemas.openxmlformats.org/presentationml/2006/main">
   <p:cSld>
     <p:spTree>
       <p:nvGrpSpPr>
@@ -15163,7 +14113,14 @@
         <p:cNvGrpSpPr/>
         <p:nvPr/>
       </p:nvGrpSpPr>
-      <p:grpSpPr/>
+      <p:grpSpPr>
+        <a:xfrm>
+          <a:off x="0" y="0"/>
+          <a:ext cx="0" cy="0"/>
+          <a:chOff x="0" y="0"/>
+          <a:chExt cx="0" cy="0"/>
+        </a:xfrm>
+      </p:grpSpPr>
       <p:sp>
         <p:nvSpPr>
           <p:cNvPr id="2" name="Rectangle 1"/>
@@ -15205,6 +14162,7 @@
           <a:lstStyle/>
           <a:p>
             <a:pPr algn="ctr"/>
+            <a:endParaRPr/>
           </a:p>
         </p:txBody>
       </p:sp>
@@ -15284,7 +14242,7 @@
           </a:fontRef>
         </p:style>
         <p:txBody>
-          <a:bodyPr rtlCol="0" anchor="ctr" wrap="square"/>
+          <a:bodyPr wrap="square" rtlCol="0" anchor="ctr"/>
           <a:lstStyle/>
           <a:p>
             <a:pPr algn="ctr">
@@ -15423,6 +14381,7 @@
           <a:lstStyle/>
           <a:p>
             <a:pPr algn="ctr"/>
+            <a:endParaRPr/>
           </a:p>
         </p:txBody>
       </p:sp>
@@ -15467,6 +14426,7 @@
           <a:lstStyle/>
           <a:p>
             <a:pPr algn="ctr"/>
+            <a:endParaRPr/>
           </a:p>
         </p:txBody>
       </p:sp>
@@ -15639,6 +14599,7 @@
           <a:lstStyle/>
           <a:p>
             <a:pPr algn="ctr"/>
+            <a:endParaRPr/>
           </a:p>
         </p:txBody>
       </p:sp>
@@ -15683,6 +14644,7 @@
           <a:lstStyle/>
           <a:p>
             <a:pPr algn="ctr"/>
+            <a:endParaRPr/>
           </a:p>
         </p:txBody>
       </p:sp>
@@ -15873,6 +14835,7 @@
           <a:lstStyle/>
           <a:p>
             <a:pPr algn="ctr"/>
+            <a:endParaRPr/>
           </a:p>
         </p:txBody>
       </p:sp>
@@ -15917,6 +14880,7 @@
           <a:lstStyle/>
           <a:p>
             <a:pPr algn="ctr"/>
+            <a:endParaRPr/>
           </a:p>
         </p:txBody>
       </p:sp>
@@ -16147,7 +15111,7 @@
 </file>
 
 <file path=ppt/slides/slide9.xml><?xml version="1.0" encoding="utf-8"?>
-<p:sld xmlns:a="http://schemas.openxmlformats.org/drawingml/2006/main" xmlns:p="http://schemas.openxmlformats.org/presentationml/2006/main" xmlns:r="http://schemas.openxmlformats.org/officeDocument/2006/relationships">
+<p:sld xmlns:a="http://schemas.openxmlformats.org/drawingml/2006/main" xmlns:r="http://schemas.openxmlformats.org/officeDocument/2006/relationships" xmlns:p="http://schemas.openxmlformats.org/presentationml/2006/main">
   <p:cSld>
     <p:spTree>
       <p:nvGrpSpPr>
@@ -16155,7 +15119,14 @@
         <p:cNvGrpSpPr/>
         <p:nvPr/>
       </p:nvGrpSpPr>
-      <p:grpSpPr/>
+      <p:grpSpPr>
+        <a:xfrm>
+          <a:off x="0" y="0"/>
+          <a:ext cx="0" cy="0"/>
+          <a:chOff x="0" y="0"/>
+          <a:chExt cx="0" cy="0"/>
+        </a:xfrm>
+      </p:grpSpPr>
       <p:sp>
         <p:nvSpPr>
           <p:cNvPr id="2" name="Rectangle 1"/>
@@ -16197,6 +15168,7 @@
           <a:lstStyle/>
           <a:p>
             <a:pPr algn="ctr"/>
+            <a:endParaRPr/>
           </a:p>
         </p:txBody>
       </p:sp>
@@ -16276,7 +15248,7 @@
           </a:fontRef>
         </p:style>
         <p:txBody>
-          <a:bodyPr rtlCol="0" anchor="ctr" wrap="square"/>
+          <a:bodyPr wrap="square" rtlCol="0" anchor="ctr"/>
           <a:lstStyle/>
           <a:p>
             <a:pPr algn="ctr">
@@ -16433,6 +15405,12 @@
                 <a:spcPts val="600"/>
               </a:spcAft>
             </a:pPr>
+            <a:endParaRPr sz="1800" b="0">
+              <a:solidFill>
+                <a:srgbClr val="1D2420"/>
+              </a:solidFill>
+              <a:latin typeface="Calibri"/>
+            </a:endParaRPr>
           </a:p>
           <a:p>
             <a:pPr algn="l">
@@ -16488,6 +15466,12 @@
                 <a:spcPts val="600"/>
               </a:spcAft>
             </a:pPr>
+            <a:endParaRPr sz="1800" b="0">
+              <a:solidFill>
+                <a:srgbClr val="1D2420"/>
+              </a:solidFill>
+              <a:latin typeface="Calibri"/>
+            </a:endParaRPr>
           </a:p>
           <a:p>
             <a:pPr algn="l">
@@ -16564,6 +15548,7 @@
           <a:lstStyle/>
           <a:p>
             <a:pPr algn="ctr"/>
+            <a:endParaRPr/>
           </a:p>
         </p:txBody>
       </p:sp>
@@ -16686,6 +15671,7 @@
           <a:lstStyle/>
           <a:p>
             <a:pPr algn="ctr"/>
+            <a:endParaRPr/>
           </a:p>
         </p:txBody>
       </p:sp>
@@ -17145,44 +16131,44 @@
         <a:sysClr val="window" lastClr="FFFFFF"/>
       </a:lt1>
       <a:dk2>
-        <a:srgbClr val="1F497D"/>
+        <a:srgbClr val="0E2841"/>
       </a:dk2>
       <a:lt2>
-        <a:srgbClr val="EEECE1"/>
+        <a:srgbClr val="E8E8E8"/>
       </a:lt2>
       <a:accent1>
-        <a:srgbClr val="4F81BD"/>
+        <a:srgbClr val="156082"/>
       </a:accent1>
       <a:accent2>
-        <a:srgbClr val="C0504D"/>
+        <a:srgbClr val="E97132"/>
       </a:accent2>
       <a:accent3>
-        <a:srgbClr val="9BBB59"/>
+        <a:srgbClr val="196B24"/>
       </a:accent3>
       <a:accent4>
-        <a:srgbClr val="8064A2"/>
+        <a:srgbClr val="0F9ED5"/>
       </a:accent4>
       <a:accent5>
-        <a:srgbClr val="4BACC6"/>
+        <a:srgbClr val="A02B93"/>
       </a:accent5>
       <a:accent6>
-        <a:srgbClr val="F79646"/>
+        <a:srgbClr val="4EA72E"/>
       </a:accent6>
       <a:hlink>
-        <a:srgbClr val="0000FF"/>
+        <a:srgbClr val="467886"/>
       </a:hlink>
       <a:folHlink>
-        <a:srgbClr val="800080"/>
+        <a:srgbClr val="96607D"/>
       </a:folHlink>
     </a:clrScheme>
     <a:fontScheme name="Office">
       <a:majorFont>
-        <a:latin typeface="Calibri"/>
+        <a:latin typeface="Aptos Display" panose="02110004020202020204"/>
         <a:ea typeface=""/>
         <a:cs typeface=""/>
-        <a:font script="Jpan" typeface="ＭＳ Ｐゴシック"/>
+        <a:font script="Jpan" typeface="游ゴシック Light"/>
         <a:font script="Hang" typeface="맑은 고딕"/>
-        <a:font script="Hans" typeface="宋体"/>
+        <a:font script="Hans" typeface="等线 Light"/>
         <a:font script="Hant" typeface="新細明體"/>
         <a:font script="Arab" typeface="Times New Roman"/>
         <a:font script="Hebr" typeface="Times New Roman"/>
@@ -17210,14 +16196,31 @@
         <a:font script="Viet" typeface="Times New Roman"/>
         <a:font script="Uigh" typeface="Microsoft Uighur"/>
         <a:font script="Geor" typeface="Sylfaen"/>
+        <a:font script="Armn" typeface="Arial"/>
+        <a:font script="Bugi" typeface="Leelawadee UI"/>
+        <a:font script="Bopo" typeface="Microsoft JhengHei"/>
+        <a:font script="Java" typeface="Javanese Text"/>
+        <a:font script="Lisu" typeface="Segoe UI"/>
+        <a:font script="Mymr" typeface="Myanmar Text"/>
+        <a:font script="Nkoo" typeface="Ebrima"/>
+        <a:font script="Olck" typeface="Nirmala UI"/>
+        <a:font script="Osma" typeface="Ebrima"/>
+        <a:font script="Phag" typeface="Phagspa"/>
+        <a:font script="Syrn" typeface="Estrangelo Edessa"/>
+        <a:font script="Syrj" typeface="Estrangelo Edessa"/>
+        <a:font script="Syre" typeface="Estrangelo Edessa"/>
+        <a:font script="Sora" typeface="Nirmala UI"/>
+        <a:font script="Tale" typeface="Microsoft Tai Le"/>
+        <a:font script="Talu" typeface="Microsoft New Tai Lue"/>
+        <a:font script="Tfng" typeface="Ebrima"/>
       </a:majorFont>
       <a:minorFont>
-        <a:latin typeface="Calibri"/>
+        <a:latin typeface="Aptos" panose="02110004020202020204"/>
         <a:ea typeface=""/>
         <a:cs typeface=""/>
-        <a:font script="Jpan" typeface="ＭＳ Ｐゴシック"/>
+        <a:font script="Jpan" typeface="游ゴシック"/>
         <a:font script="Hang" typeface="맑은 고딕"/>
-        <a:font script="Hans" typeface="宋体"/>
+        <a:font script="Hans" typeface="等线"/>
         <a:font script="Hant" typeface="新細明體"/>
         <a:font script="Arab" typeface="Arial"/>
         <a:font script="Hebr" typeface="Arial"/>
@@ -17245,6 +16248,23 @@
         <a:font script="Viet" typeface="Arial"/>
         <a:font script="Uigh" typeface="Microsoft Uighur"/>
         <a:font script="Geor" typeface="Sylfaen"/>
+        <a:font script="Armn" typeface="Arial"/>
+        <a:font script="Bugi" typeface="Leelawadee UI"/>
+        <a:font script="Bopo" typeface="Microsoft JhengHei"/>
+        <a:font script="Java" typeface="Javanese Text"/>
+        <a:font script="Lisu" typeface="Segoe UI"/>
+        <a:font script="Mymr" typeface="Myanmar Text"/>
+        <a:font script="Nkoo" typeface="Ebrima"/>
+        <a:font script="Olck" typeface="Nirmala UI"/>
+        <a:font script="Osma" typeface="Ebrima"/>
+        <a:font script="Phag" typeface="Phagspa"/>
+        <a:font script="Syrn" typeface="Estrangelo Edessa"/>
+        <a:font script="Syrj" typeface="Estrangelo Edessa"/>
+        <a:font script="Syre" typeface="Estrangelo Edessa"/>
+        <a:font script="Sora" typeface="Nirmala UI"/>
+        <a:font script="Tale" typeface="Microsoft Tai Le"/>
+        <a:font script="Talu" typeface="Microsoft New Tai Lue"/>
+        <a:font script="Tfng" typeface="Ebrima"/>
       </a:minorFont>
     </a:fontScheme>
     <a:fmtScheme name="Office">
@@ -17256,180 +16276,136 @@
           <a:gsLst>
             <a:gs pos="0">
               <a:schemeClr val="phClr">
-                <a:tint val="50000"/>
-                <a:satMod val="300000"/>
+                <a:lumMod val="110000"/>
+                <a:satMod val="105000"/>
+                <a:tint val="67000"/>
               </a:schemeClr>
             </a:gs>
-            <a:gs pos="35000">
+            <a:gs pos="50000">
               <a:schemeClr val="phClr">
-                <a:tint val="37000"/>
-                <a:satMod val="300000"/>
+                <a:lumMod val="105000"/>
+                <a:satMod val="103000"/>
+                <a:tint val="73000"/>
               </a:schemeClr>
             </a:gs>
             <a:gs pos="100000">
               <a:schemeClr val="phClr">
-                <a:tint val="15000"/>
-                <a:satMod val="350000"/>
+                <a:lumMod val="105000"/>
+                <a:satMod val="109000"/>
+                <a:tint val="81000"/>
               </a:schemeClr>
             </a:gs>
           </a:gsLst>
-          <a:lin ang="16200000" scaled="1"/>
+          <a:lin ang="5400000" scaled="0"/>
         </a:gradFill>
         <a:gradFill rotWithShape="1">
           <a:gsLst>
             <a:gs pos="0">
               <a:schemeClr val="phClr">
-                <a:tint val="100000"/>
+                <a:satMod val="103000"/>
+                <a:lumMod val="102000"/>
+                <a:tint val="94000"/>
+              </a:schemeClr>
+            </a:gs>
+            <a:gs pos="50000">
+              <a:schemeClr val="phClr">
+                <a:satMod val="110000"/>
+                <a:lumMod val="100000"/>
                 <a:shade val="100000"/>
-                <a:satMod val="130000"/>
               </a:schemeClr>
             </a:gs>
             <a:gs pos="100000">
               <a:schemeClr val="phClr">
-                <a:tint val="50000"/>
-                <a:shade val="100000"/>
-                <a:satMod val="350000"/>
+                <a:lumMod val="99000"/>
+                <a:satMod val="120000"/>
+                <a:shade val="78000"/>
               </a:schemeClr>
             </a:gs>
           </a:gsLst>
-          <a:lin ang="16200000" scaled="0"/>
+          <a:lin ang="5400000" scaled="0"/>
         </a:gradFill>
       </a:fillStyleLst>
       <a:lnStyleLst>
-        <a:ln w="9525" cap="flat" cmpd="sng" algn="ctr">
+        <a:ln w="12700" cap="flat" cmpd="sng" algn="ctr">
           <a:solidFill>
-            <a:schemeClr val="phClr">
-              <a:shade val="95000"/>
-              <a:satMod val="105000"/>
-            </a:schemeClr>
+            <a:schemeClr val="phClr"/>
           </a:solidFill>
           <a:prstDash val="solid"/>
+          <a:miter lim="800000"/>
+        </a:ln>
+        <a:ln w="19050" cap="flat" cmpd="sng" algn="ctr">
+          <a:solidFill>
+            <a:schemeClr val="phClr"/>
+          </a:solidFill>
+          <a:prstDash val="solid"/>
+          <a:miter lim="800000"/>
         </a:ln>
         <a:ln w="25400" cap="flat" cmpd="sng" algn="ctr">
           <a:solidFill>
             <a:schemeClr val="phClr"/>
           </a:solidFill>
           <a:prstDash val="solid"/>
-        </a:ln>
-        <a:ln w="38100" cap="flat" cmpd="sng" algn="ctr">
-          <a:solidFill>
-            <a:schemeClr val="phClr"/>
-          </a:solidFill>
-          <a:prstDash val="solid"/>
+          <a:miter lim="800000"/>
         </a:ln>
       </a:lnStyleLst>
       <a:effectStyleLst>
         <a:effectStyle>
+          <a:effectLst/>
+        </a:effectStyle>
+        <a:effectStyle>
+          <a:effectLst/>
+        </a:effectStyle>
+        <a:effectStyle>
           <a:effectLst>
-            <a:outerShdw blurRad="40000" dist="20000" dir="5400000" rotWithShape="0">
+            <a:outerShdw blurRad="57150" dist="19050" dir="5400000" algn="ctr" rotWithShape="0">
               <a:srgbClr val="000000">
-                <a:alpha val="38000"/>
+                <a:alpha val="63000"/>
               </a:srgbClr>
             </a:outerShdw>
           </a:effectLst>
-        </a:effectStyle>
-        <a:effectStyle>
-          <a:effectLst>
-            <a:outerShdw blurRad="40000" dist="23000" dir="5400000" rotWithShape="0">
-              <a:srgbClr val="000000">
-                <a:alpha val="35000"/>
-              </a:srgbClr>
-            </a:outerShdw>
-          </a:effectLst>
-        </a:effectStyle>
-        <a:effectStyle>
-          <a:effectLst>
-            <a:outerShdw blurRad="40000" dist="23000" dir="5400000" rotWithShape="0">
-              <a:srgbClr val="000000">
-                <a:alpha val="35000"/>
-              </a:srgbClr>
-            </a:outerShdw>
-          </a:effectLst>
-          <a:scene3d>
-            <a:camera prst="orthographicFront">
-              <a:rot lat="0" lon="0" rev="0"/>
-            </a:camera>
-            <a:lightRig rig="threePt" dir="t">
-              <a:rot lat="0" lon="0" rev="1200000"/>
-            </a:lightRig>
-          </a:scene3d>
-          <a:sp3d>
-            <a:bevelT w="63500" h="25400"/>
-          </a:sp3d>
         </a:effectStyle>
       </a:effectStyleLst>
       <a:bgFillStyleLst>
         <a:solidFill>
           <a:schemeClr val="phClr"/>
         </a:solidFill>
+        <a:solidFill>
+          <a:schemeClr val="phClr">
+            <a:tint val="95000"/>
+            <a:satMod val="170000"/>
+          </a:schemeClr>
+        </a:solidFill>
         <a:gradFill rotWithShape="1">
           <a:gsLst>
             <a:gs pos="0">
               <a:schemeClr val="phClr">
-                <a:tint val="40000"/>
-                <a:satMod val="350000"/>
+                <a:tint val="93000"/>
+                <a:satMod val="150000"/>
+                <a:shade val="98000"/>
+                <a:lumMod val="102000"/>
               </a:schemeClr>
             </a:gs>
-            <a:gs pos="40000">
+            <a:gs pos="50000">
               <a:schemeClr val="phClr">
-                <a:tint val="45000"/>
-                <a:shade val="99000"/>
-                <a:satMod val="350000"/>
+                <a:tint val="98000"/>
+                <a:satMod val="130000"/>
+                <a:shade val="90000"/>
+                <a:lumMod val="103000"/>
               </a:schemeClr>
             </a:gs>
             <a:gs pos="100000">
               <a:schemeClr val="phClr">
-                <a:shade val="20000"/>
-                <a:satMod val="255000"/>
+                <a:shade val="63000"/>
+                <a:satMod val="120000"/>
               </a:schemeClr>
             </a:gs>
           </a:gsLst>
-          <a:path path="circle">
-            <a:fillToRect l="50000" t="-80000" r="50000" b="180000"/>
-          </a:path>
-        </a:gradFill>
-        <a:gradFill rotWithShape="1">
-          <a:gsLst>
-            <a:gs pos="0">
-              <a:schemeClr val="phClr">
-                <a:tint val="80000"/>
-                <a:satMod val="300000"/>
-              </a:schemeClr>
-            </a:gs>
-            <a:gs pos="100000">
-              <a:schemeClr val="phClr">
-                <a:shade val="30000"/>
-                <a:satMod val="200000"/>
-              </a:schemeClr>
-            </a:gs>
-          </a:gsLst>
-          <a:path path="circle">
-            <a:fillToRect l="50000" t="50000" r="50000" b="50000"/>
-          </a:path>
+          <a:lin ang="5400000" scaled="0"/>
         </a:gradFill>
       </a:bgFillStyleLst>
     </a:fmtScheme>
   </a:themeElements>
   <a:objectDefaults>
-    <a:spDef>
-      <a:spPr/>
-      <a:bodyPr/>
-      <a:lstStyle/>
-      <a:style>
-        <a:lnRef idx="1">
-          <a:schemeClr val="accent1"/>
-        </a:lnRef>
-        <a:fillRef idx="3">
-          <a:schemeClr val="accent1"/>
-        </a:fillRef>
-        <a:effectRef idx="2">
-          <a:schemeClr val="accent1"/>
-        </a:effectRef>
-        <a:fontRef idx="minor">
-          <a:schemeClr val="lt1"/>
-        </a:fontRef>
-      </a:style>
-    </a:spDef>
     <a:lnDef>
       <a:spPr/>
       <a:bodyPr/>
@@ -17451,5 +16427,10 @@
     </a:lnDef>
   </a:objectDefaults>
   <a:extraClrSchemeLst/>
+  <a:extLst>
+    <a:ext uri="{05A4C25C-085E-4340-85A3-A5531E510DB2}">
+      <thm15:themeFamily xmlns:thm15="http://schemas.microsoft.com/office/thememl/2012/main" name="Office Theme" id="{2E142A2C-CD16-42D6-873A-C26D2A0506FA}" vid="{1BDDFF52-6CD6-40A5-AB3C-68EB2F1E4D0A}"/>
+    </a:ext>
+  </a:extLst>
 </a:theme>
 </file>
--- a/docs/AbastoRed_Avance2_Presentacion.pptx
+++ b/docs/AbastoRed_Avance2_Presentacion.pptx
@@ -165,7 +165,7 @@
     </p:spTree>
     <p:extLst>
       <p:ext uri="{BB962C8B-B14F-4D97-AF65-F5344CB8AC3E}">
-        <p14:creationId xmlns:p14="http://schemas.microsoft.com/office/powerpoint/2010/main" val="2441403121"/>
+        <p14:creationId xmlns:p14="http://schemas.microsoft.com/office/powerpoint/2010/main" val="2601698295"/>
       </p:ext>
     </p:extLst>
   </p:cSld>
